--- a/curso/pptx/S05.pptx
+++ b/curso/pptx/S05.pptx
@@ -3890,8 +3890,8 @@
         </p:nvSpPr>
         <p:spPr>
           <a:xfrm>
-            <a:off x="640000" y="420000"/>
-            <a:ext cx="10912000" cy="420000"/>
+            <a:off x="10652000" y="380000"/>
+            <a:ext cx="900000" cy="800000"/>
           </a:xfrm>
           <a:prstGeom prst="rect">
             <a:avLst/>
@@ -3906,17 +3906,17 @@
           <a:p>
             <a:pPr>
               <a:spcAft>
-                <a:spcPts val="810"/>
+                <a:spcPts val="1980"/>
               </a:spcAft>
             </a:pPr>
             <a:r>
-              <a:rPr sz="1800" b="1">
+              <a:rPr sz="4400" b="0">
                 <a:solidFill>
                   <a:srgbClr val="1F2A44"/>
                 </a:solidFill>
                 <a:latin typeface="Nunito Sans"/>
               </a:rPr>
-              <a:t>🦉 Aula de Filosofía</a:t>
+              <a:t>🙃</a:t>
             </a:r>
           </a:p>
         </p:txBody>

--- a/curso/pptx/S05.pptx
+++ b/curso/pptx/S05.pptx
@@ -471,426 +471,6 @@
     </a:lvl9pPr>
   </p:notesStyle>
 </p:notesMaster>
-</file>
-
-<file path=ppt/notesSlides/notesSlide1.xml><?xml version="1.0" encoding="utf-8"?>
-<p:notes xmlns:a="http://schemas.openxmlformats.org/drawingml/2006/main" xmlns:p="http://schemas.openxmlformats.org/presentationml/2006/main" xmlns:r="http://schemas.openxmlformats.org/officeDocument/2006/relationships">
-  <p:cSld>
-    <p:spTree>
-      <p:nvGrpSpPr>
-        <p:cNvPr id="1" name=""/>
-        <p:cNvGrpSpPr/>
-        <p:nvPr/>
-      </p:nvGrpSpPr>
-      <p:grpSpPr>
-        <a:xfrm>
-          <a:off x="0" y="0"/>
-          <a:ext cx="0" cy="0"/>
-          <a:chOff x="0" y="0"/>
-          <a:chExt cx="0" cy="0"/>
-        </a:xfrm>
-      </p:grpSpPr>
-      <p:sp>
-        <p:nvSpPr>
-          <p:cNvPr id="2" name="Slide Image Placeholder 1"/>
-          <p:cNvSpPr>
-            <a:spLocks noGrp="1"/>
-          </p:cNvSpPr>
-          <p:nvPr>
-            <p:ph type="sldImg" idx="2"/>
-          </p:nvPr>
-        </p:nvSpPr>
-        <p:spPr/>
-      </p:sp>
-      <p:sp>
-        <p:nvSpPr>
-          <p:cNvPr id="3" name="Notes Placeholder 2"/>
-          <p:cNvSpPr>
-            <a:spLocks noGrp="1"/>
-          </p:cNvSpPr>
-          <p:nvPr>
-            <p:ph type="body" idx="3" sz="quarter"/>
-          </p:nvPr>
-        </p:nvSpPr>
-        <p:spPr/>
-        <p:txBody>
-          <a:bodyPr/>
-          <a:lstStyle/>
-          <a:p>
-            <a:r>
-              <a:t>3 minutos. Sin apuntes. Es para recordar, no cuenta para nota.</a:t>
-            </a:r>
-          </a:p>
-        </p:txBody>
-      </p:sp>
-      <p:sp>
-        <p:nvSpPr>
-          <p:cNvPr id="4" name="Slide Number Placeholder 3"/>
-          <p:cNvSpPr>
-            <a:spLocks noGrp="1"/>
-          </p:cNvSpPr>
-          <p:nvPr>
-            <p:ph type="sldNum" idx="5" sz="quarter"/>
-          </p:nvPr>
-        </p:nvSpPr>
-        <p:spPr/>
-      </p:sp>
-    </p:spTree>
-  </p:cSld>
-  <p:clrMapOvr>
-    <a:masterClrMapping/>
-  </p:clrMapOvr>
-</p:notes>
-</file>
-
-<file path=ppt/notesSlides/notesSlide2.xml><?xml version="1.0" encoding="utf-8"?>
-<p:notes xmlns:a="http://schemas.openxmlformats.org/drawingml/2006/main" xmlns:p="http://schemas.openxmlformats.org/presentationml/2006/main" xmlns:r="http://schemas.openxmlformats.org/officeDocument/2006/relationships">
-  <p:cSld>
-    <p:spTree>
-      <p:nvGrpSpPr>
-        <p:cNvPr id="1" name=""/>
-        <p:cNvGrpSpPr/>
-        <p:nvPr/>
-      </p:nvGrpSpPr>
-      <p:grpSpPr>
-        <a:xfrm>
-          <a:off x="0" y="0"/>
-          <a:ext cx="0" cy="0"/>
-          <a:chOff x="0" y="0"/>
-          <a:chExt cx="0" cy="0"/>
-        </a:xfrm>
-      </p:grpSpPr>
-      <p:sp>
-        <p:nvSpPr>
-          <p:cNvPr id="2" name="Slide Image Placeholder 1"/>
-          <p:cNvSpPr>
-            <a:spLocks noGrp="1"/>
-          </p:cNvSpPr>
-          <p:nvPr>
-            <p:ph type="sldImg" idx="2"/>
-          </p:nvPr>
-        </p:nvSpPr>
-        <p:spPr/>
-      </p:sp>
-      <p:sp>
-        <p:nvSpPr>
-          <p:cNvPr id="3" name="Notes Placeholder 2"/>
-          <p:cNvSpPr>
-            <a:spLocks noGrp="1"/>
-          </p:cNvSpPr>
-          <p:nvPr>
-            <p:ph type="body" idx="3" sz="quarter"/>
-          </p:nvPr>
-        </p:nvSpPr>
-        <p:spPr/>
-        <p:txBody>
-          <a:bodyPr/>
-          <a:lstStyle/>
-          <a:p>
-            <a:r>
-              <a:t>3 minutos. Sin apuntes. Es para recordar, no cuenta para nota.</a:t>
-            </a:r>
-          </a:p>
-        </p:txBody>
-      </p:sp>
-      <p:sp>
-        <p:nvSpPr>
-          <p:cNvPr id="4" name="Slide Number Placeholder 3"/>
-          <p:cNvSpPr>
-            <a:spLocks noGrp="1"/>
-          </p:cNvSpPr>
-          <p:nvPr>
-            <p:ph type="sldNum" idx="5" sz="quarter"/>
-          </p:nvPr>
-        </p:nvSpPr>
-        <p:spPr/>
-      </p:sp>
-    </p:spTree>
-  </p:cSld>
-  <p:clrMapOvr>
-    <a:masterClrMapping/>
-  </p:clrMapOvr>
-</p:notes>
-</file>
-
-<file path=ppt/notesSlides/notesSlide3.xml><?xml version="1.0" encoding="utf-8"?>
-<p:notes xmlns:a="http://schemas.openxmlformats.org/drawingml/2006/main" xmlns:p="http://schemas.openxmlformats.org/presentationml/2006/main" xmlns:r="http://schemas.openxmlformats.org/officeDocument/2006/relationships">
-  <p:cSld>
-    <p:spTree>
-      <p:nvGrpSpPr>
-        <p:cNvPr id="1" name=""/>
-        <p:cNvGrpSpPr/>
-        <p:nvPr/>
-      </p:nvGrpSpPr>
-      <p:grpSpPr>
-        <a:xfrm>
-          <a:off x="0" y="0"/>
-          <a:ext cx="0" cy="0"/>
-          <a:chOff x="0" y="0"/>
-          <a:chExt cx="0" cy="0"/>
-        </a:xfrm>
-      </p:grpSpPr>
-      <p:sp>
-        <p:nvSpPr>
-          <p:cNvPr id="2" name="Slide Image Placeholder 1"/>
-          <p:cNvSpPr>
-            <a:spLocks noGrp="1"/>
-          </p:cNvSpPr>
-          <p:nvPr>
-            <p:ph type="sldImg" idx="2"/>
-          </p:nvPr>
-        </p:nvSpPr>
-        <p:spPr/>
-      </p:sp>
-      <p:sp>
-        <p:nvSpPr>
-          <p:cNvPr id="3" name="Notes Placeholder 2"/>
-          <p:cNvSpPr>
-            <a:spLocks noGrp="1"/>
-          </p:cNvSpPr>
-          <p:nvPr>
-            <p:ph type="body" idx="3" sz="quarter"/>
-          </p:nvPr>
-        </p:nvSpPr>
-        <p:spPr/>
-        <p:txBody>
-          <a:bodyPr/>
-          <a:lstStyle/>
-          <a:p>
-            <a:r>
-              <a:t>Nadie tiene que contestar: solo pensarlo.</a:t>
-            </a:r>
-          </a:p>
-        </p:txBody>
-      </p:sp>
-      <p:sp>
-        <p:nvSpPr>
-          <p:cNvPr id="4" name="Slide Number Placeholder 3"/>
-          <p:cNvSpPr>
-            <a:spLocks noGrp="1"/>
-          </p:cNvSpPr>
-          <p:nvPr>
-            <p:ph type="sldNum" idx="5" sz="quarter"/>
-          </p:nvPr>
-        </p:nvSpPr>
-        <p:spPr/>
-      </p:sp>
-    </p:spTree>
-  </p:cSld>
-  <p:clrMapOvr>
-    <a:masterClrMapping/>
-  </p:clrMapOvr>
-</p:notes>
-</file>
-
-<file path=ppt/notesSlides/notesSlide4.xml><?xml version="1.0" encoding="utf-8"?>
-<p:notes xmlns:a="http://schemas.openxmlformats.org/drawingml/2006/main" xmlns:p="http://schemas.openxmlformats.org/presentationml/2006/main" xmlns:r="http://schemas.openxmlformats.org/officeDocument/2006/relationships">
-  <p:cSld>
-    <p:spTree>
-      <p:nvGrpSpPr>
-        <p:cNvPr id="1" name=""/>
-        <p:cNvGrpSpPr/>
-        <p:nvPr/>
-      </p:nvGrpSpPr>
-      <p:grpSpPr>
-        <a:xfrm>
-          <a:off x="0" y="0"/>
-          <a:ext cx="0" cy="0"/>
-          <a:chOff x="0" y="0"/>
-          <a:chExt cx="0" cy="0"/>
-        </a:xfrm>
-      </p:grpSpPr>
-      <p:sp>
-        <p:nvSpPr>
-          <p:cNvPr id="2" name="Slide Image Placeholder 1"/>
-          <p:cNvSpPr>
-            <a:spLocks noGrp="1"/>
-          </p:cNvSpPr>
-          <p:nvPr>
-            <p:ph type="sldImg" idx="2"/>
-          </p:nvPr>
-        </p:nvSpPr>
-        <p:spPr/>
-      </p:sp>
-      <p:sp>
-        <p:nvSpPr>
-          <p:cNvPr id="3" name="Notes Placeholder 2"/>
-          <p:cNvSpPr>
-            <a:spLocks noGrp="1"/>
-          </p:cNvSpPr>
-          <p:nvPr>
-            <p:ph type="body" idx="3" sz="quarter"/>
-          </p:nvPr>
-        </p:nvSpPr>
-        <p:spPr/>
-        <p:txBody>
-          <a:bodyPr/>
-          <a:lstStyle/>
-          <a:p>
-            <a:r>
-              <a:t>Dejar unos segundos para que piensen la respuesta fácil antes de enseñar los pasos.</a:t>
-            </a:r>
-          </a:p>
-        </p:txBody>
-      </p:sp>
-      <p:sp>
-        <p:nvSpPr>
-          <p:cNvPr id="4" name="Slide Number Placeholder 3"/>
-          <p:cNvSpPr>
-            <a:spLocks noGrp="1"/>
-          </p:cNvSpPr>
-          <p:nvPr>
-            <p:ph type="sldNum" idx="5" sz="quarter"/>
-          </p:nvPr>
-        </p:nvSpPr>
-        <p:spPr/>
-      </p:sp>
-    </p:spTree>
-  </p:cSld>
-  <p:clrMapOvr>
-    <a:masterClrMapping/>
-  </p:clrMapOvr>
-</p:notes>
-</file>
-
-<file path=ppt/notesSlides/notesSlide5.xml><?xml version="1.0" encoding="utf-8"?>
-<p:notes xmlns:a="http://schemas.openxmlformats.org/drawingml/2006/main" xmlns:p="http://schemas.openxmlformats.org/presentationml/2006/main" xmlns:r="http://schemas.openxmlformats.org/officeDocument/2006/relationships">
-  <p:cSld>
-    <p:spTree>
-      <p:nvGrpSpPr>
-        <p:cNvPr id="1" name=""/>
-        <p:cNvGrpSpPr/>
-        <p:nvPr/>
-      </p:nvGrpSpPr>
-      <p:grpSpPr>
-        <a:xfrm>
-          <a:off x="0" y="0"/>
-          <a:ext cx="0" cy="0"/>
-          <a:chOff x="0" y="0"/>
-          <a:chExt cx="0" cy="0"/>
-        </a:xfrm>
-      </p:grpSpPr>
-      <p:sp>
-        <p:nvSpPr>
-          <p:cNvPr id="2" name="Slide Image Placeholder 1"/>
-          <p:cNvSpPr>
-            <a:spLocks noGrp="1"/>
-          </p:cNvSpPr>
-          <p:nvPr>
-            <p:ph type="sldImg" idx="2"/>
-          </p:nvPr>
-        </p:nvSpPr>
-        <p:spPr/>
-      </p:sp>
-      <p:sp>
-        <p:nvSpPr>
-          <p:cNvPr id="3" name="Notes Placeholder 2"/>
-          <p:cNvSpPr>
-            <a:spLocks noGrp="1"/>
-          </p:cNvSpPr>
-          <p:nvPr>
-            <p:ph type="body" idx="3" sz="quarter"/>
-          </p:nvPr>
-        </p:nvSpPr>
-        <p:spPr/>
-        <p:txBody>
-          <a:bodyPr/>
-          <a:lstStyle/>
-          <a:p>
-            <a:r>
-              <a:t>Dejar 2 minutos para que lo escriban. La diapositiva siguiente muestra el resumen.</a:t>
-            </a:r>
-          </a:p>
-        </p:txBody>
-      </p:sp>
-      <p:sp>
-        <p:nvSpPr>
-          <p:cNvPr id="4" name="Slide Number Placeholder 3"/>
-          <p:cNvSpPr>
-            <a:spLocks noGrp="1"/>
-          </p:cNvSpPr>
-          <p:nvPr>
-            <p:ph type="sldNum" idx="5" sz="quarter"/>
-          </p:nvPr>
-        </p:nvSpPr>
-        <p:spPr/>
-      </p:sp>
-    </p:spTree>
-  </p:cSld>
-  <p:clrMapOvr>
-    <a:masterClrMapping/>
-  </p:clrMapOvr>
-</p:notes>
-</file>
-
-<file path=ppt/notesSlides/notesSlide6.xml><?xml version="1.0" encoding="utf-8"?>
-<p:notes xmlns:a="http://schemas.openxmlformats.org/drawingml/2006/main" xmlns:p="http://schemas.openxmlformats.org/presentationml/2006/main" xmlns:r="http://schemas.openxmlformats.org/officeDocument/2006/relationships">
-  <p:cSld>
-    <p:spTree>
-      <p:nvGrpSpPr>
-        <p:cNvPr id="1" name=""/>
-        <p:cNvGrpSpPr/>
-        <p:nvPr/>
-      </p:nvGrpSpPr>
-      <p:grpSpPr>
-        <a:xfrm>
-          <a:off x="0" y="0"/>
-          <a:ext cx="0" cy="0"/>
-          <a:chOff x="0" y="0"/>
-          <a:chExt cx="0" cy="0"/>
-        </a:xfrm>
-      </p:grpSpPr>
-      <p:sp>
-        <p:nvSpPr>
-          <p:cNvPr id="2" name="Slide Image Placeholder 1"/>
-          <p:cNvSpPr>
-            <a:spLocks noGrp="1"/>
-          </p:cNvSpPr>
-          <p:nvPr>
-            <p:ph type="sldImg" idx="2"/>
-          </p:nvPr>
-        </p:nvSpPr>
-        <p:spPr/>
-      </p:sp>
-      <p:sp>
-        <p:nvSpPr>
-          <p:cNvPr id="3" name="Notes Placeholder 2"/>
-          <p:cNvSpPr>
-            <a:spLocks noGrp="1"/>
-          </p:cNvSpPr>
-          <p:nvPr>
-            <p:ph type="body" idx="3" sz="quarter"/>
-          </p:nvPr>
-        </p:nvSpPr>
-        <p:spPr/>
-        <p:txBody>
-          <a:bodyPr/>
-          <a:lstStyle/>
-          <a:p>
-            <a:r>
-              <a:t>Buscar: «presión de grupo adolescentes» · «por qué creemos lo que creemos»</a:t>
-            </a:r>
-          </a:p>
-        </p:txBody>
-      </p:sp>
-      <p:sp>
-        <p:nvSpPr>
-          <p:cNvPr id="4" name="Slide Number Placeholder 3"/>
-          <p:cNvSpPr>
-            <a:spLocks noGrp="1"/>
-          </p:cNvSpPr>
-          <p:nvPr>
-            <p:ph type="sldNum" idx="5" sz="quarter"/>
-          </p:nvPr>
-        </p:nvSpPr>
-        <p:spPr/>
-      </p:sp>
-    </p:spTree>
-  </p:cSld>
-  <p:clrMapOvr>
-    <a:masterClrMapping/>
-  </p:clrMapOvr>
-</p:notes>
 </file>
 
 <file path=ppt/slideLayouts/slideLayout1.xml><?xml version="1.0" encoding="utf-8"?>

--- a/curso/pptx/S05.pptx
+++ b/curso/pptx/S05.pptx
@@ -4489,7 +4489,7 @@
                 </a:solidFill>
                 <a:latin typeface="Nunito Sans"/>
               </a:rPr>
-              <a:t>Maialen cree que una crema para granos funciona. La usa toda su cuadrilla, la anuncia su influencer favorita y a ella le hace mucha ilusión.</a:t>
+              <a:t>Una chica cree que una crema para granos funciona. La usa toda su cuadrilla, la anuncia su influencer favorita y a ella le hace mucha ilusión.</a:t>
             </a:r>
           </a:p>
         </p:txBody>
@@ -4852,7 +4852,7 @@
                 </a:solidFill>
                 <a:latin typeface="Nunito Sans"/>
               </a:rPr>
-              <a:t>Chen cree que la Tierra gira alrededor del Sol. Nunca lo ha comprobado: se lo explicó su profesora.</a:t>
+              <a:t>Un chico cree que la Tierra gira alrededor del Sol. Nunca lo ha comprobado: se lo explicó su profesora.</a:t>
             </a:r>
           </a:p>
         </p:txBody>
@@ -6578,7 +6578,7 @@
                 </a:solidFill>
                 <a:latin typeface="Nunito Sans"/>
               </a:rPr>
-              <a:t>Todos en tu clase llevan las mismas zapatillas. Sin darte cuenta, empiezas a pensar que son las mejores.</a:t>
+              <a:t>Todos en la clase de una chica llevan las mismas zapatillas. Sin darse cuenta, ella empieza a pensar que son las mejores.</a:t>
             </a:r>
           </a:p>
         </p:txBody>
@@ -6617,7 +6617,7 @@
                 </a:solidFill>
                 <a:latin typeface="Nunito Sans"/>
               </a:rPr>
-              <a:t>¿Lo piensas por una razón… o por otra cosa?</a:t>
+              <a:t>¿Lo piensa por una razón… o por otra cosa?</a:t>
             </a:r>
           </a:p>
         </p:txBody>

--- a/curso/pptx/S05.pptx
+++ b/curso/pptx/S05.pptx
@@ -20,8 +20,6 @@
     <p:sldId id="268" r:id="rId20"/>
     <p:sldId id="269" r:id="rId21"/>
     <p:sldId id="270" r:id="rId22"/>
-    <p:sldId id="271" r:id="rId23"/>
-    <p:sldId id="272" r:id="rId24"/>
   </p:sldIdLst>
   <p:sldSz cx="12192000" cy="6858000" type="screen4x3"/>
   <p:notesSz cx="6858000" cy="9144000"/>
@@ -3535,7 +3533,7 @@
                 </a:solidFill>
                 <a:latin typeface="Nunito Sans"/>
               </a:rPr>
-              <a:t>PENSAMIENTO CRÍTICO · SESIÓN 5 · UNIDAD 1 · PENSAR, CREER Y SABER</a:t>
+              <a:t>PENSAMIENTO CRÍTICO · SESIÓN 5 · UNIDAD 1 · PENSAR CRÍTICAMENTE</a:t>
             </a:r>
           </a:p>
         </p:txBody>
@@ -3574,7 +3572,7 @@
                 </a:solidFill>
                 <a:latin typeface="Fredoka"/>
               </a:rPr>
-              <a:t>¿Por qué creemos lo que creemos?</a:t>
+              <a:t>Repaso y examen de la unidad 1</a:t>
             </a:r>
           </a:p>
         </p:txBody>
@@ -3613,7 +3611,7 @@
                 </a:solidFill>
                 <a:latin typeface="Nunito Sans"/>
               </a:rPr>
-              <a:t>Muchas creencias no vienen de razones, sino de la costumbre, el grupo, la autoridad o la emoción, como en el cuento del rey que cojeaba.</a:t>
+              <a:t>Repasamos la unidad: pensar críticamente, hechos y opiniones, por qué creemos lo que creemos, y convencer o manipular.</a:t>
             </a:r>
           </a:p>
         </p:txBody>
@@ -3632,7 +3630,7 @@
     <p:bg>
       <p:bgPr>
         <a:solidFill>
-          <a:srgbClr val="FBF7EF"/>
+          <a:srgbClr val="1F2A44"/>
         </a:solidFill>
         <a:effectLst/>
       </p:bgPr>
@@ -3652,8 +3650,8 @@
         </p:nvSpPr>
         <p:spPr>
           <a:xfrm>
-            <a:off x="640000" y="380000"/>
-            <a:ext cx="10912000" cy="420000"/>
+            <a:off x="640000" y="2300000"/>
+            <a:ext cx="10912000" cy="500000"/>
           </a:xfrm>
           <a:prstGeom prst="rect">
             <a:avLst/>
@@ -3668,17 +3666,17 @@
           <a:p>
             <a:pPr>
               <a:spcAft>
-                <a:spcPts val="630"/>
+                <a:spcPts val="810"/>
               </a:spcAft>
             </a:pPr>
             <a:r>
-              <a:rPr sz="1400" b="1">
-                <a:solidFill>
-                  <a:srgbClr val="E8793A"/>
-                </a:solidFill>
-                <a:latin typeface="Nunito Sans"/>
-              </a:rPr>
-              <a:t>BLOQUE 2 · EL REY QUE COJEABA</a:t>
+              <a:rPr sz="1800" b="1">
+                <a:solidFill>
+                  <a:srgbClr val="F4B183"/>
+                </a:solidFill>
+                <a:latin typeface="Nunito Sans"/>
+              </a:rPr>
+              <a:t>BLOQUE 2</a:t>
             </a:r>
           </a:p>
         </p:txBody>
@@ -3691,7 +3689,7 @@
         </p:nvSpPr>
         <p:spPr>
           <a:xfrm>
-            <a:off x="640000" y="760000"/>
+            <a:off x="640000" y="2800000"/>
             <a:ext cx="10912000" cy="800000"/>
           </a:xfrm>
           <a:prstGeom prst="rect">
@@ -3707,276 +3705,17 @@
           <a:p>
             <a:pPr>
               <a:spcAft>
-                <a:spcPts val="1710"/>
+                <a:spcPts val="2160"/>
               </a:spcAft>
             </a:pPr>
             <a:r>
-              <a:rPr sz="3800" b="1">
-                <a:solidFill>
-                  <a:srgbClr val="1F2A44"/>
+              <a:rPr sz="4800" b="1">
+                <a:solidFill>
+                  <a:srgbClr val="FBF7EF"/>
                 </a:solidFill>
                 <a:latin typeface="Fredoka"/>
               </a:rPr>
-              <a:t>El cuento (1) · Todo el palacio cojea</a:t>
-            </a:r>
-          </a:p>
-        </p:txBody>
-      </p:sp>
-      <p:sp>
-        <p:nvSpPr>
-          <p:cNvPr id="4" name="Rectangle 3"/>
-          <p:cNvSpPr/>
-          <p:nvPr/>
-        </p:nvSpPr>
-        <p:spPr>
-          <a:xfrm>
-            <a:off x="640000" y="1600000"/>
-            <a:ext cx="10912000" cy="1100000"/>
-          </a:xfrm>
-          <a:prstGeom prst="rect">
-            <a:avLst/>
-          </a:prstGeom>
-          <a:solidFill>
-            <a:srgbClr val="FFFFFF"/>
-          </a:solidFill>
-          <a:ln>
-            <a:noFill/>
-          </a:ln>
-        </p:spPr>
-        <p:style>
-          <a:lnRef idx="1">
-            <a:schemeClr val="accent1"/>
-          </a:lnRef>
-          <a:fillRef idx="3">
-            <a:schemeClr val="accent1"/>
-          </a:fillRef>
-          <a:effectRef idx="2">
-            <a:schemeClr val="accent1"/>
-          </a:effectRef>
-          <a:fontRef idx="minor">
-            <a:schemeClr val="lt1"/>
-          </a:fontRef>
-        </p:style>
-        <p:txBody>
-          <a:bodyPr rtlCol="0" anchor="ctr"/>
-          <a:lstStyle/>
-          <a:p>
-            <a:pPr algn="ctr"/>
-          </a:p>
-        </p:txBody>
-      </p:sp>
-      <p:sp>
-        <p:nvSpPr>
-          <p:cNvPr id="5" name="TextBox 4"/>
-          <p:cNvSpPr txBox="1"/>
-          <p:nvPr/>
-        </p:nvSpPr>
-        <p:spPr>
-          <a:xfrm>
-            <a:off x="840000" y="1650000"/>
-            <a:ext cx="10512000" cy="1000000"/>
-          </a:xfrm>
-          <a:prstGeom prst="rect">
-            <a:avLst/>
-          </a:prstGeom>
-          <a:noFill/>
-        </p:spPr>
-        <p:txBody>
-          <a:bodyPr wrap="square" anchor="ctr">
-            <a:spAutoFit/>
-          </a:bodyPr>
-          <a:lstStyle/>
-          <a:p>
-            <a:pPr>
-              <a:spcAft>
-                <a:spcPts val="1170"/>
-              </a:spcAft>
-            </a:pPr>
-            <a:r>
-              <a:rPr sz="2600" b="1">
-                <a:solidFill>
-                  <a:srgbClr val="1F2A44"/>
-                </a:solidFill>
-                <a:latin typeface="Nunito Sans"/>
-              </a:rPr>
-              <a:t>Había una vez un rey que era cojo. Sus cortesanos, para caerle bien, empezaron a cojear. Pronto cojeaba todo el palacio: ministros, guardias, cocineros… Nadie caminaba recto.</a:t>
-            </a:r>
-          </a:p>
-        </p:txBody>
-      </p:sp>
-      <p:sp>
-        <p:nvSpPr>
-          <p:cNvPr id="6" name="TextBox 5"/>
-          <p:cNvSpPr txBox="1"/>
-          <p:nvPr/>
-        </p:nvSpPr>
-        <p:spPr>
-          <a:xfrm>
-            <a:off x="640000" y="2900000"/>
-            <a:ext cx="10912000" cy="3500000"/>
-          </a:xfrm>
-          <a:prstGeom prst="rect">
-            <a:avLst/>
-          </a:prstGeom>
-          <a:noFill/>
-        </p:spPr>
-        <p:txBody>
-          <a:bodyPr wrap="square">
-            <a:spAutoFit/>
-          </a:bodyPr>
-          <a:lstStyle/>
-          <a:p>
-            <a:pPr>
-              <a:spcAft>
-                <a:spcPts val="1080"/>
-              </a:spcAft>
-            </a:pPr>
-            <a:r>
-              <a:rPr sz="2400" b="1">
-                <a:solidFill>
-                  <a:srgbClr val="E8793A"/>
-                </a:solidFill>
-                <a:latin typeface="Nunito Sans"/>
-              </a:rPr>
-              <a:t>1. </a:t>
-            </a:r>
-            <a:r>
-              <a:rPr sz="2400" b="0">
-                <a:solidFill>
-                  <a:srgbClr val="1F2A44"/>
-                </a:solidFill>
-                <a:latin typeface="Nunito Sans"/>
-              </a:rPr>
-              <a:t>¿Por qué cojeaban? No les dolía nada.</a:t>
-            </a:r>
-          </a:p>
-          <a:p>
-            <a:pPr>
-              <a:spcAft>
-                <a:spcPts val="1080"/>
-              </a:spcAft>
-            </a:pPr>
-            <a:r>
-              <a:rPr sz="2400" b="1">
-                <a:solidFill>
-                  <a:srgbClr val="E8793A"/>
-                </a:solidFill>
-                <a:latin typeface="Nunito Sans"/>
-              </a:rPr>
-              <a:t>2. </a:t>
-            </a:r>
-            <a:r>
-              <a:rPr sz="2400" b="0">
-                <a:solidFill>
-                  <a:srgbClr val="1F2A44"/>
-                </a:solidFill>
-                <a:latin typeface="Nunito Sans"/>
-              </a:rPr>
-              <a:t>Al principio, para agradar a la </a:t>
-            </a:r>
-            <a:r>
-              <a:rPr sz="2400" b="1">
-                <a:solidFill>
-                  <a:srgbClr val="1F2A44"/>
-                </a:solidFill>
-                <a:latin typeface="Nunito Sans"/>
-              </a:rPr>
-              <a:t>autoridad</a:t>
-            </a:r>
-            <a:r>
-              <a:rPr sz="2400" b="0">
-                <a:solidFill>
-                  <a:srgbClr val="1F2A44"/>
-                </a:solidFill>
-                <a:latin typeface="Nunito Sans"/>
-              </a:rPr>
-              <a:t>: el rey.</a:t>
-            </a:r>
-          </a:p>
-          <a:p>
-            <a:pPr>
-              <a:spcAft>
-                <a:spcPts val="1080"/>
-              </a:spcAft>
-            </a:pPr>
-            <a:r>
-              <a:rPr sz="2400" b="1">
-                <a:solidFill>
-                  <a:srgbClr val="E8793A"/>
-                </a:solidFill>
-                <a:latin typeface="Nunito Sans"/>
-              </a:rPr>
-              <a:t>3. </a:t>
-            </a:r>
-            <a:r>
-              <a:rPr sz="2400" b="0">
-                <a:solidFill>
-                  <a:srgbClr val="1F2A44"/>
-                </a:solidFill>
-                <a:latin typeface="Nunito Sans"/>
-              </a:rPr>
-              <a:t>Después, porque lo hacían todos: el </a:t>
-            </a:r>
-            <a:r>
-              <a:rPr sz="2400" b="1">
-                <a:solidFill>
-                  <a:srgbClr val="1F2A44"/>
-                </a:solidFill>
-                <a:latin typeface="Nunito Sans"/>
-              </a:rPr>
-              <a:t>grupo</a:t>
-            </a:r>
-            <a:r>
-              <a:rPr sz="2400" b="0">
-                <a:solidFill>
-                  <a:srgbClr val="1F2A44"/>
-                </a:solidFill>
-                <a:latin typeface="Nunito Sans"/>
-              </a:rPr>
-              <a:t>. Y al final ya era </a:t>
-            </a:r>
-            <a:r>
-              <a:rPr sz="2400" b="1">
-                <a:solidFill>
-                  <a:srgbClr val="1F2A44"/>
-                </a:solidFill>
-                <a:latin typeface="Nunito Sans"/>
-              </a:rPr>
-              <a:t>costumbre</a:t>
-            </a:r>
-            <a:r>
-              <a:rPr sz="2400" b="0">
-                <a:solidFill>
-                  <a:srgbClr val="1F2A44"/>
-                </a:solidFill>
-                <a:latin typeface="Nunito Sans"/>
-              </a:rPr>
-              <a:t>.</a:t>
-            </a:r>
-          </a:p>
-          <a:p>
-            <a:pPr>
-              <a:spcAft>
-                <a:spcPts val="1080"/>
-              </a:spcAft>
-            </a:pPr>
-            <a:r>
-              <a:rPr sz="2400" b="1">
-                <a:solidFill>
-                  <a:srgbClr val="E8793A"/>
-                </a:solidFill>
-                <a:latin typeface="Nunito Sans"/>
-              </a:rPr>
-              <a:t>4. </a:t>
-            </a:r>
-            <a:r>
-              <a:rPr sz="2400" b="0">
-                <a:solidFill>
-                  <a:srgbClr val="1F2A44"/>
-                </a:solidFill>
-                <a:latin typeface="Nunito Sans"/>
-              </a:rPr>
-              <a:t>Conclusión: nadie tenía una buena razón para cojear.</a:t>
+              <a:t>Un caso con todo</a:t>
             </a:r>
           </a:p>
         </p:txBody>
@@ -4041,7 +3780,7 @@
                 </a:solidFill>
                 <a:latin typeface="Nunito Sans"/>
               </a:rPr>
-              <a:t>BLOQUE 2 · EL REY QUE COJEABA</a:t>
+              <a:t>BLOQUE 2 · UN CASO CON TODO</a:t>
             </a:r>
           </a:p>
         </p:txBody>
@@ -4080,7 +3819,7 @@
                 </a:solidFill>
                 <a:latin typeface="Fredoka"/>
               </a:rPr>
-              <a:t>El cuento (2) · El caballero</a:t>
+              <a:t>Agua con limón</a:t>
             </a:r>
           </a:p>
         </p:txBody>
@@ -4162,7 +3901,7 @@
                 </a:solidFill>
                 <a:latin typeface="Nunito Sans"/>
               </a:rPr>
-              <a:t>Llega un caballero de fuera que camina recto. Todos se ríen. El rey se enfada. El caballero dice: «Majestad, cojeo de los dos pies a la vez».</a:t>
+              <a:t>Un chico lee en Instagram: «El agua con limón en ayunas quema grasa. Lo dice una influencer de fitness y lo hace todo mi gimnasio». Está seguro de que es verdad.</a:t>
             </a:r>
           </a:p>
         </p:txBody>
@@ -4210,7 +3949,7 @@
                 </a:solidFill>
                 <a:latin typeface="Nunito Sans"/>
               </a:rPr>
-              <a:t>¿Por qué se ríen? Porque es distinto al grupo, no porque haga algo mal.</a:t>
+              <a:t>¿Hecho, gusto u opinión? Es una afirmación de hecho: verdadera o falsa.</a:t>
             </a:r>
           </a:p>
           <a:p>
@@ -4235,25 +3974,7 @@
                 </a:solidFill>
                 <a:latin typeface="Nunito Sans"/>
               </a:rPr>
-              <a:t>Aquí actúa la </a:t>
-            </a:r>
-            <a:r>
-              <a:rPr sz="2400" b="1">
-                <a:solidFill>
-                  <a:srgbClr val="1F2A44"/>
-                </a:solidFill>
-                <a:latin typeface="Nunito Sans"/>
-              </a:rPr>
-              <a:t>emoción</a:t>
-            </a:r>
-            <a:r>
-              <a:rPr sz="2400" b="0">
-                <a:solidFill>
-                  <a:srgbClr val="1F2A44"/>
-                </a:solidFill>
-                <a:latin typeface="Nunito Sans"/>
-              </a:rPr>
-              <a:t>: la burla y el miedo a quedar mal.</a:t>
+              <a:t>¿Qué caminos hay? Autoridad (la influencer) y grupo (el gimnasio).</a:t>
             </a:r>
           </a:p>
           <a:p>
@@ -4278,7 +3999,7 @@
                 </a:solidFill>
                 <a:latin typeface="Nunito Sans"/>
               </a:rPr>
-              <a:t>Su respuesta es ingeniosa: se burla de la costumbre y a la vez se libra del castigo.</a:t>
+              <a:t>¿Qué gana quien lo dice? Una influencer de fitness puede cobrar por anunciar productos o buscar visitas.</a:t>
             </a:r>
           </a:p>
           <a:p>
@@ -4303,7 +4024,7 @@
                 </a:solidFill>
                 <a:latin typeface="Nunito Sans"/>
               </a:rPr>
-              <a:t>Conclusión: el único que camina bien parece el raro. Lo normal no siempre es lo razonable.</a:t>
+              <a:t>Conclusión: la pregunta es «¿cómo lo sabes?». Hay que mirar qué dicen fuentes médicas.</a:t>
             </a:r>
           </a:p>
         </p:txBody>
@@ -4317,6 +4038,358 @@
 </file>
 
 <file path=ppt/slides/slide12.xml><?xml version="1.0" encoding="utf-8"?>
+<p:sld xmlns:a="http://schemas.openxmlformats.org/drawingml/2006/main" xmlns:p="http://schemas.openxmlformats.org/presentationml/2006/main" xmlns:r="http://schemas.openxmlformats.org/officeDocument/2006/relationships">
+  <p:cSld>
+    <p:bg>
+      <p:bgPr>
+        <a:solidFill>
+          <a:srgbClr val="F6C9A8"/>
+        </a:solidFill>
+        <a:effectLst/>
+      </p:bgPr>
+    </p:bg>
+    <p:spTree>
+      <p:nvGrpSpPr>
+        <p:cNvPr id="1" name=""/>
+        <p:cNvGrpSpPr/>
+        <p:nvPr/>
+      </p:nvGrpSpPr>
+      <p:grpSpPr/>
+      <p:sp>
+        <p:nvSpPr>
+          <p:cNvPr id="2" name="TextBox 1"/>
+          <p:cNvSpPr txBox="1"/>
+          <p:nvPr/>
+        </p:nvSpPr>
+        <p:spPr>
+          <a:xfrm>
+            <a:off x="640000" y="380000"/>
+            <a:ext cx="10912000" cy="420000"/>
+          </a:xfrm>
+          <a:prstGeom prst="rect">
+            <a:avLst/>
+          </a:prstGeom>
+          <a:noFill/>
+        </p:spPr>
+        <p:txBody>
+          <a:bodyPr wrap="square">
+            <a:spAutoFit/>
+          </a:bodyPr>
+          <a:lstStyle/>
+          <a:p>
+            <a:pPr>
+              <a:spcAft>
+                <a:spcPts val="630"/>
+              </a:spcAft>
+            </a:pPr>
+            <a:r>
+              <a:rPr sz="1400" b="1">
+                <a:solidFill>
+                  <a:srgbClr val="1F2A44"/>
+                </a:solidFill>
+                <a:latin typeface="Nunito Sans"/>
+              </a:rPr>
+              <a:t>CASO TRAMPA · BLOQUE 2 · UN CASO CON TODO</a:t>
+            </a:r>
+          </a:p>
+        </p:txBody>
+      </p:sp>
+      <p:sp>
+        <p:nvSpPr>
+          <p:cNvPr id="3" name="TextBox 2"/>
+          <p:cNvSpPr txBox="1"/>
+          <p:nvPr/>
+        </p:nvSpPr>
+        <p:spPr>
+          <a:xfrm>
+            <a:off x="640000" y="760000"/>
+            <a:ext cx="10912000" cy="800000"/>
+          </a:xfrm>
+          <a:prstGeom prst="rect">
+            <a:avLst/>
+          </a:prstGeom>
+          <a:noFill/>
+        </p:spPr>
+        <p:txBody>
+          <a:bodyPr wrap="square">
+            <a:spAutoFit/>
+          </a:bodyPr>
+          <a:lstStyle/>
+          <a:p>
+            <a:pPr>
+              <a:spcAft>
+                <a:spcPts val="1710"/>
+              </a:spcAft>
+            </a:pPr>
+            <a:r>
+              <a:rPr sz="3800" b="1">
+                <a:solidFill>
+                  <a:srgbClr val="1F2A44"/>
+                </a:solidFill>
+                <a:latin typeface="Fredoka"/>
+              </a:rPr>
+              <a:t>⚠ ¿Interés = manipulación?</a:t>
+            </a:r>
+          </a:p>
+        </p:txBody>
+      </p:sp>
+      <p:sp>
+        <p:nvSpPr>
+          <p:cNvPr id="4" name="Rectangle 3"/>
+          <p:cNvSpPr/>
+          <p:nvPr/>
+        </p:nvSpPr>
+        <p:spPr>
+          <a:xfrm>
+            <a:off x="640000" y="1600000"/>
+            <a:ext cx="10912000" cy="1100000"/>
+          </a:xfrm>
+          <a:prstGeom prst="rect">
+            <a:avLst/>
+          </a:prstGeom>
+          <a:solidFill>
+            <a:srgbClr val="FBF7EF"/>
+          </a:solidFill>
+          <a:ln>
+            <a:noFill/>
+          </a:ln>
+        </p:spPr>
+        <p:style>
+          <a:lnRef idx="1">
+            <a:schemeClr val="accent1"/>
+          </a:lnRef>
+          <a:fillRef idx="3">
+            <a:schemeClr val="accent1"/>
+          </a:fillRef>
+          <a:effectRef idx="2">
+            <a:schemeClr val="accent1"/>
+          </a:effectRef>
+          <a:fontRef idx="minor">
+            <a:schemeClr val="lt1"/>
+          </a:fontRef>
+        </p:style>
+        <p:txBody>
+          <a:bodyPr rtlCol="0" anchor="ctr"/>
+          <a:lstStyle/>
+          <a:p>
+            <a:pPr algn="ctr"/>
+          </a:p>
+        </p:txBody>
+      </p:sp>
+      <p:sp>
+        <p:nvSpPr>
+          <p:cNvPr id="5" name="TextBox 4"/>
+          <p:cNvSpPr txBox="1"/>
+          <p:nvPr/>
+        </p:nvSpPr>
+        <p:spPr>
+          <a:xfrm>
+            <a:off x="840000" y="1650000"/>
+            <a:ext cx="10512000" cy="1000000"/>
+          </a:xfrm>
+          <a:prstGeom prst="rect">
+            <a:avLst/>
+          </a:prstGeom>
+          <a:noFill/>
+        </p:spPr>
+        <p:txBody>
+          <a:bodyPr wrap="square" anchor="ctr">
+            <a:spAutoFit/>
+          </a:bodyPr>
+          <a:lstStyle/>
+          <a:p>
+            <a:pPr>
+              <a:spcAft>
+                <a:spcPts val="1170"/>
+              </a:spcAft>
+            </a:pPr>
+            <a:r>
+              <a:rPr sz="2600" b="1">
+                <a:solidFill>
+                  <a:srgbClr val="1F2A44"/>
+                </a:solidFill>
+                <a:latin typeface="Nunito Sans"/>
+              </a:rPr>
+              <a:t>Tu dentista te dice que te cepilles los dientes tres veces al día. Vive de cuidar dientes.</a:t>
+            </a:r>
+          </a:p>
+        </p:txBody>
+      </p:sp>
+      <p:sp>
+        <p:nvSpPr>
+          <p:cNvPr id="6" name="TextBox 5"/>
+          <p:cNvSpPr txBox="1"/>
+          <p:nvPr/>
+        </p:nvSpPr>
+        <p:spPr>
+          <a:xfrm>
+            <a:off x="640000" y="2900000"/>
+            <a:ext cx="10912000" cy="3500000"/>
+          </a:xfrm>
+          <a:prstGeom prst="rect">
+            <a:avLst/>
+          </a:prstGeom>
+          <a:noFill/>
+        </p:spPr>
+        <p:txBody>
+          <a:bodyPr wrap="square">
+            <a:spAutoFit/>
+          </a:bodyPr>
+          <a:lstStyle/>
+          <a:p>
+            <a:pPr>
+              <a:spcAft>
+                <a:spcPts val="1080"/>
+              </a:spcAft>
+            </a:pPr>
+            <a:r>
+              <a:rPr sz="2400" b="1">
+                <a:solidFill>
+                  <a:srgbClr val="E8793A"/>
+                </a:solidFill>
+                <a:latin typeface="Nunito Sans"/>
+              </a:rPr>
+              <a:t>1. </a:t>
+            </a:r>
+            <a:r>
+              <a:rPr sz="2400" b="0">
+                <a:solidFill>
+                  <a:srgbClr val="1F2A44"/>
+                </a:solidFill>
+                <a:latin typeface="Nunito Sans"/>
+              </a:rPr>
+              <a:t>Gana dinero con los dientes… ¿entonces te está manipulando?</a:t>
+            </a:r>
+          </a:p>
+          <a:p>
+            <a:pPr>
+              <a:spcAft>
+                <a:spcPts val="1080"/>
+              </a:spcAft>
+            </a:pPr>
+            <a:r>
+              <a:rPr sz="2400" b="1">
+                <a:solidFill>
+                  <a:srgbClr val="E8793A"/>
+                </a:solidFill>
+                <a:latin typeface="Nunito Sans"/>
+              </a:rPr>
+              <a:t>2. </a:t>
+            </a:r>
+            <a:r>
+              <a:rPr sz="2400" b="0">
+                <a:solidFill>
+                  <a:srgbClr val="1F2A44"/>
+                </a:solidFill>
+                <a:latin typeface="Nunito Sans"/>
+              </a:rPr>
+              <a:t>Parece que sí: tiene un </a:t>
+            </a:r>
+            <a:r>
+              <a:rPr sz="2400" b="1">
+                <a:solidFill>
+                  <a:srgbClr val="1F2A44"/>
+                </a:solidFill>
+                <a:latin typeface="Nunito Sans"/>
+              </a:rPr>
+              <a:t>interés</a:t>
+            </a:r>
+            <a:r>
+              <a:rPr sz="2400" b="0">
+                <a:solidFill>
+                  <a:srgbClr val="1F2A44"/>
+                </a:solidFill>
+                <a:latin typeface="Nunito Sans"/>
+              </a:rPr>
+              <a:t> en el tema.</a:t>
+            </a:r>
+          </a:p>
+          <a:p>
+            <a:pPr>
+              <a:spcAft>
+                <a:spcPts val="1080"/>
+              </a:spcAft>
+            </a:pPr>
+            <a:r>
+              <a:rPr sz="2400" b="1">
+                <a:solidFill>
+                  <a:srgbClr val="E8793A"/>
+                </a:solidFill>
+                <a:latin typeface="Nunito Sans"/>
+              </a:rPr>
+              <a:t>3. </a:t>
+            </a:r>
+            <a:r>
+              <a:rPr sz="2400" b="0">
+                <a:solidFill>
+                  <a:srgbClr val="1F2A44"/>
+                </a:solidFill>
+                <a:latin typeface="Nunito Sans"/>
+              </a:rPr>
+              <a:t>Pero no gana nada más porque te cepilles; da razones que se pueden comprobar (caries, estudios).</a:t>
+            </a:r>
+          </a:p>
+          <a:p>
+            <a:pPr>
+              <a:spcAft>
+                <a:spcPts val="1080"/>
+              </a:spcAft>
+            </a:pPr>
+            <a:r>
+              <a:rPr sz="2400" b="1">
+                <a:solidFill>
+                  <a:srgbClr val="E8793A"/>
+                </a:solidFill>
+                <a:latin typeface="Nunito Sans"/>
+              </a:rPr>
+              <a:t>4. </a:t>
+            </a:r>
+            <a:r>
+              <a:rPr sz="2400" b="0">
+                <a:solidFill>
+                  <a:srgbClr val="1F2A44"/>
+                </a:solidFill>
+                <a:latin typeface="Nunito Sans"/>
+              </a:rPr>
+              <a:t>No te mete prisa ni te esconde nada.</a:t>
+            </a:r>
+          </a:p>
+          <a:p>
+            <a:pPr>
+              <a:spcAft>
+                <a:spcPts val="1080"/>
+              </a:spcAft>
+            </a:pPr>
+            <a:r>
+              <a:rPr sz="2400" b="1">
+                <a:solidFill>
+                  <a:srgbClr val="E8793A"/>
+                </a:solidFill>
+                <a:latin typeface="Nunito Sans"/>
+              </a:rPr>
+              <a:t>5. </a:t>
+            </a:r>
+            <a:r>
+              <a:rPr sz="2400" b="0">
+                <a:solidFill>
+                  <a:srgbClr val="1F2A44"/>
+                </a:solidFill>
+                <a:latin typeface="Nunito Sans"/>
+              </a:rPr>
+              <a:t>Conclusión: tener un interés no es manipular. Lo tengo en cuenta, pero miro las razones.</a:t>
+            </a:r>
+          </a:p>
+        </p:txBody>
+      </p:sp>
+    </p:spTree>
+  </p:cSld>
+  <p:clrMapOvr>
+    <a:masterClrMapping/>
+  </p:clrMapOvr>
+</p:sld>
+</file>
+
+<file path=ppt/slides/slide13.xml><?xml version="1.0" encoding="utf-8"?>
 <p:sld xmlns:a="http://schemas.openxmlformats.org/drawingml/2006/main" xmlns:p="http://schemas.openxmlformats.org/presentationml/2006/main" xmlns:r="http://schemas.openxmlformats.org/officeDocument/2006/relationships">
   <p:cSld>
     <p:bg>
@@ -4368,7 +4441,7 @@
                 </a:solidFill>
                 <a:latin typeface="Nunito Sans"/>
               </a:rPr>
-              <a:t>BLOQUE 2 · EL REY QUE COJEABA</a:t>
+              <a:t>LO DE HOY EN TRES LÍNEAS</a:t>
             </a:r>
           </a:p>
         </p:txBody>
@@ -4407,64 +4480,21 @@
                 </a:solidFill>
                 <a:latin typeface="Fredoka"/>
               </a:rPr>
-              <a:t>Caso de hoy · Una crema para granos</a:t>
-            </a:r>
-          </a:p>
-        </p:txBody>
-      </p:sp>
-      <p:sp>
-        <p:nvSpPr>
-          <p:cNvPr id="4" name="Rectangle 3"/>
-          <p:cNvSpPr/>
-          <p:nvPr/>
-        </p:nvSpPr>
-        <p:spPr>
-          <a:xfrm>
-            <a:off x="640000" y="1600000"/>
-            <a:ext cx="10912000" cy="1100000"/>
-          </a:xfrm>
-          <a:prstGeom prst="rect">
-            <a:avLst/>
-          </a:prstGeom>
-          <a:solidFill>
-            <a:srgbClr val="FFFFFF"/>
-          </a:solidFill>
-          <a:ln>
-            <a:noFill/>
-          </a:ln>
-        </p:spPr>
-        <p:style>
-          <a:lnRef idx="1">
-            <a:schemeClr val="accent1"/>
-          </a:lnRef>
-          <a:fillRef idx="3">
-            <a:schemeClr val="accent1"/>
-          </a:fillRef>
-          <a:effectRef idx="2">
-            <a:schemeClr val="accent1"/>
-          </a:effectRef>
-          <a:fontRef idx="minor">
-            <a:schemeClr val="lt1"/>
-          </a:fontRef>
-        </p:style>
-        <p:txBody>
-          <a:bodyPr rtlCol="0" anchor="ctr"/>
-          <a:lstStyle/>
-          <a:p>
-            <a:pPr algn="ctr"/>
-          </a:p>
-        </p:txBody>
-      </p:sp>
-      <p:sp>
-        <p:nvSpPr>
-          <p:cNvPr id="5" name="TextBox 4"/>
+              <a:t>Escríbelo tú primero, sin mirar</a:t>
+            </a:r>
+          </a:p>
+        </p:txBody>
+      </p:sp>
+      <p:sp>
+        <p:nvSpPr>
+          <p:cNvPr id="4" name="TextBox 3"/>
           <p:cNvSpPr txBox="1"/>
           <p:nvPr/>
         </p:nvSpPr>
         <p:spPr>
           <a:xfrm>
-            <a:off x="840000" y="1650000"/>
-            <a:ext cx="10512000" cy="1000000"/>
+            <a:off x="640000" y="1800000"/>
+            <a:ext cx="10912000" cy="1500000"/>
           </a:xfrm>
           <a:prstGeom prst="rect">
             <a:avLst/>
@@ -4472,7 +4502,7 @@
           <a:noFill/>
         </p:spPr>
         <p:txBody>
-          <a:bodyPr wrap="square" anchor="ctr">
+          <a:bodyPr wrap="square">
             <a:spAutoFit/>
           </a:bodyPr>
           <a:lstStyle/>
@@ -4483,542 +4513,13 @@
               </a:spcAft>
             </a:pPr>
             <a:r>
-              <a:rPr sz="2600" b="1">
-                <a:solidFill>
-                  <a:srgbClr val="1F2A44"/>
-                </a:solidFill>
-                <a:latin typeface="Nunito Sans"/>
-              </a:rPr>
-              <a:t>Una chica cree que una crema para granos funciona. La usa toda su cuadrilla, la anuncia su influencer favorita y a ella le hace mucha ilusión.</a:t>
-            </a:r>
-          </a:p>
-        </p:txBody>
-      </p:sp>
-      <p:sp>
-        <p:nvSpPr>
-          <p:cNvPr id="6" name="TextBox 5"/>
-          <p:cNvSpPr txBox="1"/>
-          <p:nvPr/>
-        </p:nvSpPr>
-        <p:spPr>
-          <a:xfrm>
-            <a:off x="640000" y="2900000"/>
-            <a:ext cx="10912000" cy="3500000"/>
-          </a:xfrm>
-          <a:prstGeom prst="rect">
-            <a:avLst/>
-          </a:prstGeom>
-          <a:noFill/>
-        </p:spPr>
-        <p:txBody>
-          <a:bodyPr wrap="square">
-            <a:spAutoFit/>
-          </a:bodyPr>
-          <a:lstStyle/>
-          <a:p>
-            <a:pPr>
-              <a:spcAft>
-                <a:spcPts val="1080"/>
-              </a:spcAft>
-            </a:pPr>
-            <a:r>
-              <a:rPr sz="2400" b="1">
-                <a:solidFill>
-                  <a:srgbClr val="E8793A"/>
-                </a:solidFill>
-                <a:latin typeface="Nunito Sans"/>
-              </a:rPr>
-              <a:t>1. </a:t>
-            </a:r>
-            <a:r>
-              <a:rPr sz="2400" b="0">
-                <a:solidFill>
-                  <a:srgbClr val="1F2A44"/>
-                </a:solidFill>
-                <a:latin typeface="Nunito Sans"/>
-              </a:rPr>
-              <a:t>«La usa toda su cuadrilla»: camino del </a:t>
-            </a:r>
-            <a:r>
-              <a:rPr sz="2400" b="1">
-                <a:solidFill>
-                  <a:srgbClr val="1F2A44"/>
-                </a:solidFill>
-                <a:latin typeface="Nunito Sans"/>
-              </a:rPr>
-              <a:t>grupo</a:t>
-            </a:r>
-            <a:r>
-              <a:rPr sz="2400" b="0">
-                <a:solidFill>
-                  <a:srgbClr val="1F2A44"/>
-                </a:solidFill>
-                <a:latin typeface="Nunito Sans"/>
-              </a:rPr>
-              <a:t>.</a:t>
-            </a:r>
-          </a:p>
-          <a:p>
-            <a:pPr>
-              <a:spcAft>
-                <a:spcPts val="1080"/>
-              </a:spcAft>
-            </a:pPr>
-            <a:r>
-              <a:rPr sz="2400" b="1">
-                <a:solidFill>
-                  <a:srgbClr val="E8793A"/>
-                </a:solidFill>
-                <a:latin typeface="Nunito Sans"/>
-              </a:rPr>
-              <a:t>2. </a:t>
-            </a:r>
-            <a:r>
-              <a:rPr sz="2400" b="0">
-                <a:solidFill>
-                  <a:srgbClr val="1F2A44"/>
-                </a:solidFill>
-                <a:latin typeface="Nunito Sans"/>
-              </a:rPr>
-              <a:t>«La anuncia su influencer»: camino de la </a:t>
-            </a:r>
-            <a:r>
-              <a:rPr sz="2400" b="1">
-                <a:solidFill>
-                  <a:srgbClr val="1F2A44"/>
-                </a:solidFill>
-                <a:latin typeface="Nunito Sans"/>
-              </a:rPr>
-              <a:t>autoridad</a:t>
-            </a:r>
-            <a:r>
-              <a:rPr sz="2400" b="0">
-                <a:solidFill>
-                  <a:srgbClr val="1F2A44"/>
-                </a:solidFill>
-                <a:latin typeface="Nunito Sans"/>
-              </a:rPr>
-              <a:t>. Pero ¿sabe de piel?</a:t>
-            </a:r>
-          </a:p>
-          <a:p>
-            <a:pPr>
-              <a:spcAft>
-                <a:spcPts val="1080"/>
-              </a:spcAft>
-            </a:pPr>
-            <a:r>
-              <a:rPr sz="2400" b="1">
-                <a:solidFill>
-                  <a:srgbClr val="E8793A"/>
-                </a:solidFill>
-                <a:latin typeface="Nunito Sans"/>
-              </a:rPr>
-              <a:t>3. </a:t>
-            </a:r>
-            <a:r>
-              <a:rPr sz="2400" b="0">
-                <a:solidFill>
-                  <a:srgbClr val="1F2A44"/>
-                </a:solidFill>
-                <a:latin typeface="Nunito Sans"/>
-              </a:rPr>
-              <a:t>«Le hace mucha ilusión»: camino de la </a:t>
-            </a:r>
-            <a:r>
-              <a:rPr sz="2400" b="1">
-                <a:solidFill>
-                  <a:srgbClr val="1F2A44"/>
-                </a:solidFill>
-                <a:latin typeface="Nunito Sans"/>
-              </a:rPr>
-              <a:t>emoción</a:t>
-            </a:r>
-            <a:r>
-              <a:rPr sz="2400" b="0">
-                <a:solidFill>
-                  <a:srgbClr val="1F2A44"/>
-                </a:solidFill>
-                <a:latin typeface="Nunito Sans"/>
-              </a:rPr>
-              <a:t>.</a:t>
-            </a:r>
-          </a:p>
-          <a:p>
-            <a:pPr>
-              <a:spcAft>
-                <a:spcPts val="1080"/>
-              </a:spcAft>
-            </a:pPr>
-            <a:r>
-              <a:rPr sz="2400" b="1">
-                <a:solidFill>
-                  <a:srgbClr val="E8793A"/>
-                </a:solidFill>
-                <a:latin typeface="Nunito Sans"/>
-              </a:rPr>
-              <a:t>4. </a:t>
-            </a:r>
-            <a:r>
-              <a:rPr sz="2400" b="0">
-                <a:solidFill>
-                  <a:srgbClr val="1F2A44"/>
-                </a:solidFill>
-                <a:latin typeface="Nunito Sans"/>
-              </a:rPr>
-              <a:t>Conclusión: nada de eso dice si la crema funciona. Mejor preguntar a quien sabe: un médico o una farmacéutica.</a:t>
-            </a:r>
-          </a:p>
-        </p:txBody>
-      </p:sp>
-    </p:spTree>
-  </p:cSld>
-  <p:clrMapOvr>
-    <a:masterClrMapping/>
-  </p:clrMapOvr>
-</p:sld>
-</file>
-
-<file path=ppt/slides/slide13.xml><?xml version="1.0" encoding="utf-8"?>
-<p:sld xmlns:a="http://schemas.openxmlformats.org/drawingml/2006/main" xmlns:p="http://schemas.openxmlformats.org/presentationml/2006/main" xmlns:r="http://schemas.openxmlformats.org/officeDocument/2006/relationships">
-  <p:cSld>
-    <p:bg>
-      <p:bgPr>
-        <a:solidFill>
-          <a:srgbClr val="F6C9A8"/>
-        </a:solidFill>
-        <a:effectLst/>
-      </p:bgPr>
-    </p:bg>
-    <p:spTree>
-      <p:nvGrpSpPr>
-        <p:cNvPr id="1" name=""/>
-        <p:cNvGrpSpPr/>
-        <p:nvPr/>
-      </p:nvGrpSpPr>
-      <p:grpSpPr/>
-      <p:sp>
-        <p:nvSpPr>
-          <p:cNvPr id="2" name="TextBox 1"/>
-          <p:cNvSpPr txBox="1"/>
-          <p:nvPr/>
-        </p:nvSpPr>
-        <p:spPr>
-          <a:xfrm>
-            <a:off x="640000" y="380000"/>
-            <a:ext cx="10912000" cy="420000"/>
-          </a:xfrm>
-          <a:prstGeom prst="rect">
-            <a:avLst/>
-          </a:prstGeom>
-          <a:noFill/>
-        </p:spPr>
-        <p:txBody>
-          <a:bodyPr wrap="square">
-            <a:spAutoFit/>
-          </a:bodyPr>
-          <a:lstStyle/>
-          <a:p>
-            <a:pPr>
-              <a:spcAft>
-                <a:spcPts val="630"/>
-              </a:spcAft>
-            </a:pPr>
-            <a:r>
-              <a:rPr sz="1400" b="1">
-                <a:solidFill>
-                  <a:srgbClr val="1F2A44"/>
-                </a:solidFill>
-                <a:latin typeface="Nunito Sans"/>
-              </a:rPr>
-              <a:t>CASO TRAMPA · BLOQUE 2 · EL REY QUE COJEABA</a:t>
-            </a:r>
-          </a:p>
-        </p:txBody>
-      </p:sp>
-      <p:sp>
-        <p:nvSpPr>
-          <p:cNvPr id="3" name="TextBox 2"/>
-          <p:cNvSpPr txBox="1"/>
-          <p:nvPr/>
-        </p:nvSpPr>
-        <p:spPr>
-          <a:xfrm>
-            <a:off x="640000" y="760000"/>
-            <a:ext cx="10912000" cy="800000"/>
-          </a:xfrm>
-          <a:prstGeom prst="rect">
-            <a:avLst/>
-          </a:prstGeom>
-          <a:noFill/>
-        </p:spPr>
-        <p:txBody>
-          <a:bodyPr wrap="square">
-            <a:spAutoFit/>
-          </a:bodyPr>
-          <a:lstStyle/>
-          <a:p>
-            <a:pPr>
-              <a:spcAft>
-                <a:spcPts val="1710"/>
-              </a:spcAft>
-            </a:pPr>
-            <a:r>
-              <a:rPr sz="3800" b="1">
-                <a:solidFill>
-                  <a:srgbClr val="1F2A44"/>
-                </a:solidFill>
-                <a:latin typeface="Fredoka"/>
-              </a:rPr>
-              <a:t>⚠ ¿Autoridad = mala razón?</a:t>
-            </a:r>
-          </a:p>
-        </p:txBody>
-      </p:sp>
-      <p:sp>
-        <p:nvSpPr>
-          <p:cNvPr id="4" name="Rectangle 3"/>
-          <p:cNvSpPr/>
-          <p:nvPr/>
-        </p:nvSpPr>
-        <p:spPr>
-          <a:xfrm>
-            <a:off x="640000" y="1600000"/>
-            <a:ext cx="10912000" cy="1100000"/>
-          </a:xfrm>
-          <a:prstGeom prst="rect">
-            <a:avLst/>
-          </a:prstGeom>
-          <a:solidFill>
-            <a:srgbClr val="FBF7EF"/>
-          </a:solidFill>
-          <a:ln>
-            <a:noFill/>
-          </a:ln>
-        </p:spPr>
-        <p:style>
-          <a:lnRef idx="1">
-            <a:schemeClr val="accent1"/>
-          </a:lnRef>
-          <a:fillRef idx="3">
-            <a:schemeClr val="accent1"/>
-          </a:fillRef>
-          <a:effectRef idx="2">
-            <a:schemeClr val="accent1"/>
-          </a:effectRef>
-          <a:fontRef idx="minor">
-            <a:schemeClr val="lt1"/>
-          </a:fontRef>
-        </p:style>
-        <p:txBody>
-          <a:bodyPr rtlCol="0" anchor="ctr"/>
-          <a:lstStyle/>
-          <a:p>
-            <a:pPr algn="ctr"/>
-          </a:p>
-        </p:txBody>
-      </p:sp>
-      <p:sp>
-        <p:nvSpPr>
-          <p:cNvPr id="5" name="TextBox 4"/>
-          <p:cNvSpPr txBox="1"/>
-          <p:nvPr/>
-        </p:nvSpPr>
-        <p:spPr>
-          <a:xfrm>
-            <a:off x="840000" y="1650000"/>
-            <a:ext cx="10512000" cy="1000000"/>
-          </a:xfrm>
-          <a:prstGeom prst="rect">
-            <a:avLst/>
-          </a:prstGeom>
-          <a:noFill/>
-        </p:spPr>
-        <p:txBody>
-          <a:bodyPr wrap="square" anchor="ctr">
-            <a:spAutoFit/>
-          </a:bodyPr>
-          <a:lstStyle/>
-          <a:p>
-            <a:pPr>
-              <a:spcAft>
-                <a:spcPts val="1170"/>
-              </a:spcAft>
-            </a:pPr>
-            <a:r>
-              <a:rPr sz="2600" b="1">
-                <a:solidFill>
-                  <a:srgbClr val="1F2A44"/>
-                </a:solidFill>
-                <a:latin typeface="Nunito Sans"/>
-              </a:rPr>
-              <a:t>Un chico cree que la Tierra gira alrededor del Sol. Nunca lo ha comprobado: se lo explicó su profesora.</a:t>
-            </a:r>
-          </a:p>
-        </p:txBody>
-      </p:sp>
-      <p:sp>
-        <p:nvSpPr>
-          <p:cNvPr id="6" name="TextBox 5"/>
-          <p:cNvSpPr txBox="1"/>
-          <p:nvPr/>
-        </p:nvSpPr>
-        <p:spPr>
-          <a:xfrm>
-            <a:off x="640000" y="2900000"/>
-            <a:ext cx="10912000" cy="3500000"/>
-          </a:xfrm>
-          <a:prstGeom prst="rect">
-            <a:avLst/>
-          </a:prstGeom>
-          <a:noFill/>
-        </p:spPr>
-        <p:txBody>
-          <a:bodyPr wrap="square">
-            <a:spAutoFit/>
-          </a:bodyPr>
-          <a:lstStyle/>
-          <a:p>
-            <a:pPr>
-              <a:spcAft>
-                <a:spcPts val="1080"/>
-              </a:spcAft>
-            </a:pPr>
-            <a:r>
-              <a:rPr sz="2400" b="1">
-                <a:solidFill>
-                  <a:srgbClr val="E8793A"/>
-                </a:solidFill>
-                <a:latin typeface="Nunito Sans"/>
-              </a:rPr>
-              <a:t>1. </a:t>
-            </a:r>
-            <a:r>
-              <a:rPr sz="2400" b="0">
-                <a:solidFill>
-                  <a:srgbClr val="1F2A44"/>
-                </a:solidFill>
-                <a:latin typeface="Nunito Sans"/>
-              </a:rPr>
-              <a:t>Lo cree por autoridad… ¿entonces es una mala razón?</a:t>
-            </a:r>
-          </a:p>
-          <a:p>
-            <a:pPr>
-              <a:spcAft>
-                <a:spcPts val="1080"/>
-              </a:spcAft>
-            </a:pPr>
-            <a:r>
-              <a:rPr sz="2400" b="1">
-                <a:solidFill>
-                  <a:srgbClr val="E8793A"/>
-                </a:solidFill>
-                <a:latin typeface="Nunito Sans"/>
-              </a:rPr>
-              <a:t>2. </a:t>
-            </a:r>
-            <a:r>
-              <a:rPr sz="2400" b="0">
-                <a:solidFill>
-                  <a:srgbClr val="1F2A44"/>
-                </a:solidFill>
-                <a:latin typeface="Nunito Sans"/>
-              </a:rPr>
-              <a:t>Sí, es el camino de la autoridad.</a:t>
-            </a:r>
-          </a:p>
-          <a:p>
-            <a:pPr>
-              <a:spcAft>
-                <a:spcPts val="1080"/>
-              </a:spcAft>
-            </a:pPr>
-            <a:r>
-              <a:rPr sz="2400" b="1">
-                <a:solidFill>
-                  <a:srgbClr val="E8793A"/>
-                </a:solidFill>
-                <a:latin typeface="Nunito Sans"/>
-              </a:rPr>
-              <a:t>3. </a:t>
-            </a:r>
-            <a:r>
-              <a:rPr sz="2400" b="0">
-                <a:solidFill>
-                  <a:srgbClr val="1F2A44"/>
-                </a:solidFill>
-                <a:latin typeface="Nunito Sans"/>
-              </a:rPr>
-              <a:t>Pero la profesora </a:t>
-            </a:r>
-            <a:r>
-              <a:rPr sz="2400" b="1">
-                <a:solidFill>
-                  <a:srgbClr val="1F2A44"/>
-                </a:solidFill>
-                <a:latin typeface="Nunito Sans"/>
-              </a:rPr>
-              <a:t>sabe del tema</a:t>
-            </a:r>
-            <a:r>
-              <a:rPr sz="2400" b="0">
-                <a:solidFill>
-                  <a:srgbClr val="1F2A44"/>
-                </a:solidFill>
-                <a:latin typeface="Nunito Sans"/>
-              </a:rPr>
-              <a:t>, y la ciencia lo ha comprobado muchísimas veces.</a:t>
-            </a:r>
-          </a:p>
-          <a:p>
-            <a:pPr>
-              <a:spcAft>
-                <a:spcPts val="1080"/>
-              </a:spcAft>
-            </a:pPr>
-            <a:r>
-              <a:rPr sz="2400" b="1">
-                <a:solidFill>
-                  <a:srgbClr val="E8793A"/>
-                </a:solidFill>
-                <a:latin typeface="Nunito Sans"/>
-              </a:rPr>
-              <a:t>4. </a:t>
-            </a:r>
-            <a:r>
-              <a:rPr sz="2400" b="0">
-                <a:solidFill>
-                  <a:srgbClr val="1F2A44"/>
-                </a:solidFill>
-                <a:latin typeface="Nunito Sans"/>
-              </a:rPr>
-              <a:t>No es como el influencer de la crema: él no sabe de piel.</a:t>
-            </a:r>
-          </a:p>
-          <a:p>
-            <a:pPr>
-              <a:spcAft>
-                <a:spcPts val="1080"/>
-              </a:spcAft>
-            </a:pPr>
-            <a:r>
-              <a:rPr sz="2400" b="1">
-                <a:solidFill>
-                  <a:srgbClr val="E8793A"/>
-                </a:solidFill>
-                <a:latin typeface="Nunito Sans"/>
-              </a:rPr>
-              <a:t>5. </a:t>
-            </a:r>
-            <a:r>
-              <a:rPr sz="2400" b="0">
-                <a:solidFill>
-                  <a:srgbClr val="1F2A44"/>
-                </a:solidFill>
-                <a:latin typeface="Nunito Sans"/>
-              </a:rPr>
-              <a:t>Conclusión: el problema no es fiarse de alguien, sino fiarse de quien no sabe.</a:t>
+              <a:rPr sz="2600" b="0">
+                <a:solidFill>
+                  <a:srgbClr val="4A5568"/>
+                </a:solidFill>
+                <a:latin typeface="Nunito Sans"/>
+              </a:rPr>
+              <a:t>Dos minutos. Después lo comparamos.</a:t>
             </a:r>
           </a:p>
         </p:txBody>
@@ -5096,8 +4597,8 @@
         </p:nvSpPr>
         <p:spPr>
           <a:xfrm>
-            <a:off x="640000" y="760000"/>
-            <a:ext cx="10912000" cy="800000"/>
+            <a:off x="640000" y="1300000"/>
+            <a:ext cx="10912000" cy="4800000"/>
           </a:xfrm>
           <a:prstGeom prst="rect">
             <a:avLst/>
@@ -5112,56 +4613,76 @@
           <a:p>
             <a:pPr>
               <a:spcAft>
-                <a:spcPts val="1710"/>
+                <a:spcPts val="1350"/>
               </a:spcAft>
             </a:pPr>
             <a:r>
-              <a:rPr sz="3800" b="1">
+              <a:rPr sz="3000" b="1">
+                <a:solidFill>
+                  <a:srgbClr val="E8793A"/>
+                </a:solidFill>
+                <a:latin typeface="Nunito Sans"/>
+              </a:rPr>
+              <a:t>1. </a:t>
+            </a:r>
+            <a:r>
+              <a:rPr sz="3000" b="0">
                 <a:solidFill>
                   <a:srgbClr val="1F2A44"/>
                 </a:solidFill>
-                <a:latin typeface="Fredoka"/>
-              </a:rPr>
-              <a:t>Escríbelo tú primero, sin mirar</a:t>
-            </a:r>
-          </a:p>
-        </p:txBody>
-      </p:sp>
-      <p:sp>
-        <p:nvSpPr>
-          <p:cNvPr id="4" name="TextBox 3"/>
-          <p:cNvSpPr txBox="1"/>
-          <p:nvPr/>
-        </p:nvSpPr>
-        <p:spPr>
-          <a:xfrm>
-            <a:off x="640000" y="1800000"/>
-            <a:ext cx="10912000" cy="1500000"/>
-          </a:xfrm>
-          <a:prstGeom prst="rect">
-            <a:avLst/>
-          </a:prstGeom>
-          <a:noFill/>
-        </p:spPr>
-        <p:txBody>
-          <a:bodyPr wrap="square">
-            <a:spAutoFit/>
-          </a:bodyPr>
-          <a:lstStyle/>
+                <a:latin typeface="Nunito Sans"/>
+              </a:rPr>
+              <a:t>Pensar críticamente es pedir y dar razones: «¿cómo lo sabes?».</a:t>
+            </a:r>
+          </a:p>
           <a:p>
             <a:pPr>
               <a:spcAft>
-                <a:spcPts val="1170"/>
+                <a:spcPts val="1350"/>
               </a:spcAft>
             </a:pPr>
             <a:r>
-              <a:rPr sz="2600" b="0">
-                <a:solidFill>
-                  <a:srgbClr val="4A5568"/>
-                </a:solidFill>
-                <a:latin typeface="Nunito Sans"/>
-              </a:rPr>
-              <a:t>Dos minutos. Después lo comparamos.</a:t>
+              <a:rPr sz="3000" b="1">
+                <a:solidFill>
+                  <a:srgbClr val="E8793A"/>
+                </a:solidFill>
+                <a:latin typeface="Nunito Sans"/>
+              </a:rPr>
+              <a:t>2. </a:t>
+            </a:r>
+            <a:r>
+              <a:rPr sz="3000" b="0">
+                <a:solidFill>
+                  <a:srgbClr val="1F2A44"/>
+                </a:solidFill>
+                <a:latin typeface="Nunito Sans"/>
+              </a:rPr>
+              <a:t>Los hechos dicen cómo son las cosas; los gustos hablan de mí; las opiniones se defienden con razones.</a:t>
+            </a:r>
+          </a:p>
+          <a:p>
+            <a:pPr>
+              <a:spcAft>
+                <a:spcPts val="1350"/>
+              </a:spcAft>
+            </a:pPr>
+            <a:r>
+              <a:rPr sz="3000" b="1">
+                <a:solidFill>
+                  <a:srgbClr val="E8793A"/>
+                </a:solidFill>
+                <a:latin typeface="Nunito Sans"/>
+              </a:rPr>
+              <a:t>3. </a:t>
+            </a:r>
+            <a:r>
+              <a:rPr sz="3000" b="0">
+                <a:solidFill>
+                  <a:srgbClr val="1F2A44"/>
+                </a:solidFill>
+                <a:latin typeface="Nunito Sans"/>
+              </a:rPr>
+              <a:t>Costumbre, grupo, autoridad o emoción no son razones por sí solas; convencer da razones y manipular las esquiva.</a:t>
             </a:r>
           </a:p>
         </p:txBody>
@@ -5175,169 +4696,6 @@
 </file>
 
 <file path=ppt/slides/slide15.xml><?xml version="1.0" encoding="utf-8"?>
-<p:sld xmlns:a="http://schemas.openxmlformats.org/drawingml/2006/main" xmlns:p="http://schemas.openxmlformats.org/presentationml/2006/main" xmlns:r="http://schemas.openxmlformats.org/officeDocument/2006/relationships">
-  <p:cSld>
-    <p:bg>
-      <p:bgPr>
-        <a:solidFill>
-          <a:srgbClr val="FBF7EF"/>
-        </a:solidFill>
-        <a:effectLst/>
-      </p:bgPr>
-    </p:bg>
-    <p:spTree>
-      <p:nvGrpSpPr>
-        <p:cNvPr id="1" name=""/>
-        <p:cNvGrpSpPr/>
-        <p:nvPr/>
-      </p:nvGrpSpPr>
-      <p:grpSpPr/>
-      <p:sp>
-        <p:nvSpPr>
-          <p:cNvPr id="2" name="TextBox 1"/>
-          <p:cNvSpPr txBox="1"/>
-          <p:nvPr/>
-        </p:nvSpPr>
-        <p:spPr>
-          <a:xfrm>
-            <a:off x="640000" y="380000"/>
-            <a:ext cx="10912000" cy="420000"/>
-          </a:xfrm>
-          <a:prstGeom prst="rect">
-            <a:avLst/>
-          </a:prstGeom>
-          <a:noFill/>
-        </p:spPr>
-        <p:txBody>
-          <a:bodyPr wrap="square">
-            <a:spAutoFit/>
-          </a:bodyPr>
-          <a:lstStyle/>
-          <a:p>
-            <a:pPr>
-              <a:spcAft>
-                <a:spcPts val="630"/>
-              </a:spcAft>
-            </a:pPr>
-            <a:r>
-              <a:rPr sz="1400" b="1">
-                <a:solidFill>
-                  <a:srgbClr val="E8793A"/>
-                </a:solidFill>
-                <a:latin typeface="Nunito Sans"/>
-              </a:rPr>
-              <a:t>LO DE HOY EN TRES LÍNEAS</a:t>
-            </a:r>
-          </a:p>
-        </p:txBody>
-      </p:sp>
-      <p:sp>
-        <p:nvSpPr>
-          <p:cNvPr id="3" name="TextBox 2"/>
-          <p:cNvSpPr txBox="1"/>
-          <p:nvPr/>
-        </p:nvSpPr>
-        <p:spPr>
-          <a:xfrm>
-            <a:off x="640000" y="1300000"/>
-            <a:ext cx="10912000" cy="4800000"/>
-          </a:xfrm>
-          <a:prstGeom prst="rect">
-            <a:avLst/>
-          </a:prstGeom>
-          <a:noFill/>
-        </p:spPr>
-        <p:txBody>
-          <a:bodyPr wrap="square">
-            <a:spAutoFit/>
-          </a:bodyPr>
-          <a:lstStyle/>
-          <a:p>
-            <a:pPr>
-              <a:spcAft>
-                <a:spcPts val="1350"/>
-              </a:spcAft>
-            </a:pPr>
-            <a:r>
-              <a:rPr sz="3000" b="1">
-                <a:solidFill>
-                  <a:srgbClr val="E8793A"/>
-                </a:solidFill>
-                <a:latin typeface="Nunito Sans"/>
-              </a:rPr>
-              <a:t>1. </a:t>
-            </a:r>
-            <a:r>
-              <a:rPr sz="3000" b="0">
-                <a:solidFill>
-                  <a:srgbClr val="1F2A44"/>
-                </a:solidFill>
-                <a:latin typeface="Nunito Sans"/>
-              </a:rPr>
-              <a:t>Muchas creencias vienen de la costumbre, el grupo, la autoridad o la emoción.</a:t>
-            </a:r>
-          </a:p>
-          <a:p>
-            <a:pPr>
-              <a:spcAft>
-                <a:spcPts val="1350"/>
-              </a:spcAft>
-            </a:pPr>
-            <a:r>
-              <a:rPr sz="3000" b="1">
-                <a:solidFill>
-                  <a:srgbClr val="E8793A"/>
-                </a:solidFill>
-                <a:latin typeface="Nunito Sans"/>
-              </a:rPr>
-              <a:t>2. </a:t>
-            </a:r>
-            <a:r>
-              <a:rPr sz="3000" b="0">
-                <a:solidFill>
-                  <a:srgbClr val="1F2A44"/>
-                </a:solidFill>
-                <a:latin typeface="Nunito Sans"/>
-              </a:rPr>
-              <a:t>Esos caminos pueden acertar o fallar: fiarse de quien sabe del tema es razonable.</a:t>
-            </a:r>
-          </a:p>
-          <a:p>
-            <a:pPr>
-              <a:spcAft>
-                <a:spcPts val="1350"/>
-              </a:spcAft>
-            </a:pPr>
-            <a:r>
-              <a:rPr sz="3000" b="1">
-                <a:solidFill>
-                  <a:srgbClr val="E8793A"/>
-                </a:solidFill>
-                <a:latin typeface="Nunito Sans"/>
-              </a:rPr>
-              <a:t>3. </a:t>
-            </a:r>
-            <a:r>
-              <a:rPr sz="3000" b="0">
-                <a:solidFill>
-                  <a:srgbClr val="1F2A44"/>
-                </a:solidFill>
-                <a:latin typeface="Nunito Sans"/>
-              </a:rPr>
-              <a:t>Lo importante es poder revisarlas, no creer como el palacio que cojeaba.</a:t>
-            </a:r>
-          </a:p>
-        </p:txBody>
-      </p:sp>
-    </p:spTree>
-  </p:cSld>
-  <p:clrMapOvr>
-    <a:masterClrMapping/>
-  </p:clrMapOvr>
-</p:sld>
-</file>
-
-<file path=ppt/slides/slide16.xml><?xml version="1.0" encoding="utf-8"?>
 <p:sld xmlns:a="http://schemas.openxmlformats.org/drawingml/2006/main" xmlns:p="http://schemas.openxmlformats.org/presentationml/2006/main" xmlns:r="http://schemas.openxmlformats.org/officeDocument/2006/relationships">
   <p:cSld>
     <p:bg>
@@ -5389,149 +4747,6 @@
                 </a:solidFill>
                 <a:latin typeface="Nunito Sans"/>
               </a:rPr>
-              <a:t>VÍDEO</a:t>
-            </a:r>
-          </a:p>
-        </p:txBody>
-      </p:sp>
-      <p:sp>
-        <p:nvSpPr>
-          <p:cNvPr id="3" name="TextBox 2"/>
-          <p:cNvSpPr txBox="1"/>
-          <p:nvPr/>
-        </p:nvSpPr>
-        <p:spPr>
-          <a:xfrm>
-            <a:off x="640000" y="760000"/>
-            <a:ext cx="10912000" cy="800000"/>
-          </a:xfrm>
-          <a:prstGeom prst="rect">
-            <a:avLst/>
-          </a:prstGeom>
-          <a:noFill/>
-        </p:spPr>
-        <p:txBody>
-          <a:bodyPr wrap="square">
-            <a:spAutoFit/>
-          </a:bodyPr>
-          <a:lstStyle/>
-          <a:p>
-            <a:pPr>
-              <a:spcAft>
-                <a:spcPts val="1620"/>
-              </a:spcAft>
-            </a:pPr>
-            <a:r>
-              <a:rPr sz="3600" b="1">
-                <a:solidFill>
-                  <a:srgbClr val="FBF7EF"/>
-                </a:solidFill>
-                <a:latin typeface="Fredoka"/>
-              </a:rPr>
-              <a:t>La presión de grupo explicada para adolescentes</a:t>
-            </a:r>
-          </a:p>
-        </p:txBody>
-      </p:sp>
-      <p:sp>
-        <p:nvSpPr>
-          <p:cNvPr id="4" name="TextBox 3"/>
-          <p:cNvSpPr txBox="1"/>
-          <p:nvPr/>
-        </p:nvSpPr>
-        <p:spPr>
-          <a:xfrm>
-            <a:off x="640000" y="2200000"/>
-            <a:ext cx="10912000" cy="2000000"/>
-          </a:xfrm>
-          <a:prstGeom prst="rect">
-            <a:avLst/>
-          </a:prstGeom>
-          <a:noFill/>
-        </p:spPr>
-        <p:txBody>
-          <a:bodyPr wrap="square">
-            <a:spAutoFit/>
-          </a:bodyPr>
-          <a:lstStyle/>
-          <a:p>
-            <a:pPr>
-              <a:spcAft>
-                <a:spcPts val="1080"/>
-              </a:spcAft>
-            </a:pPr>
-            <a:r>
-              <a:rPr sz="2400" b="0">
-                <a:solidFill>
-                  <a:srgbClr val="C9D3E6"/>
-                </a:solidFill>
-                <a:latin typeface="Nunito Sans"/>
-              </a:rPr>
-              <a:t>Ver cómo el grupo nos empuja a pensar y hacer cosas sin razones. Evitar el experimento de Asch: se verá en la sesión 29.</a:t>
-            </a:r>
-          </a:p>
-        </p:txBody>
-      </p:sp>
-    </p:spTree>
-  </p:cSld>
-  <p:clrMapOvr>
-    <a:masterClrMapping/>
-  </p:clrMapOvr>
-</p:sld>
-</file>
-
-<file path=ppt/slides/slide17.xml><?xml version="1.0" encoding="utf-8"?>
-<p:sld xmlns:a="http://schemas.openxmlformats.org/drawingml/2006/main" xmlns:p="http://schemas.openxmlformats.org/presentationml/2006/main" xmlns:r="http://schemas.openxmlformats.org/officeDocument/2006/relationships">
-  <p:cSld>
-    <p:bg>
-      <p:bgPr>
-        <a:solidFill>
-          <a:srgbClr val="1F2A44"/>
-        </a:solidFill>
-        <a:effectLst/>
-      </p:bgPr>
-    </p:bg>
-    <p:spTree>
-      <p:nvGrpSpPr>
-        <p:cNvPr id="1" name=""/>
-        <p:cNvGrpSpPr/>
-        <p:nvPr/>
-      </p:nvGrpSpPr>
-      <p:grpSpPr/>
-      <p:sp>
-        <p:nvSpPr>
-          <p:cNvPr id="2" name="TextBox 1"/>
-          <p:cNvSpPr txBox="1"/>
-          <p:nvPr/>
-        </p:nvSpPr>
-        <p:spPr>
-          <a:xfrm>
-            <a:off x="640000" y="380000"/>
-            <a:ext cx="10912000" cy="420000"/>
-          </a:xfrm>
-          <a:prstGeom prst="rect">
-            <a:avLst/>
-          </a:prstGeom>
-          <a:noFill/>
-        </p:spPr>
-        <p:txBody>
-          <a:bodyPr wrap="square">
-            <a:spAutoFit/>
-          </a:bodyPr>
-          <a:lstStyle/>
-          <a:p>
-            <a:pPr>
-              <a:spcAft>
-                <a:spcPts val="630"/>
-              </a:spcAft>
-            </a:pPr>
-            <a:r>
-              <a:rPr sz="1400" b="1">
-                <a:solidFill>
-                  <a:srgbClr val="F4B183"/>
-                </a:solidFill>
-                <a:latin typeface="Nunito Sans"/>
-              </a:rPr>
               <a:t>AHORA, LA HOJA DEL DÍA</a:t>
             </a:r>
           </a:p>
@@ -5973,7 +5188,7 @@
                 </a:solidFill>
                 <a:latin typeface="Nunito Sans"/>
               </a:rPr>
-              <a:t>1.ª pasada: sin apuntes, con bolígrafo. 2.ª pasada: con los apuntes, en otro color. Marca «seguro» o «dudo» en cada respuesta.</a:t>
+              <a:t>Sin apuntes. Junto a cada respuesta, marca «seguro» o «dudo».</a:t>
             </a:r>
           </a:p>
         </p:txBody>
@@ -6125,7 +5340,7 @@
                 </a:solidFill>
                 <a:latin typeface="Nunito Sans"/>
               </a:rPr>
-              <a:t>Preguntar bien es preguntar para ______, no para pillar al otro.  (sesión 4)</a:t>
+              <a:t>Emocionar no es manipular: el problema es usar la emoción en ______ de razones.  (sesión 4)</a:t>
             </a:r>
           </a:p>
           <a:p>
@@ -6150,7 +5365,7 @@
                 </a:solidFill>
                 <a:latin typeface="Nunito Sans"/>
               </a:rPr>
-              <a:t>Antes de contestar, mira qué da por ______ la pregunta.  (sesión 4)</a:t>
+              <a:t>Convencer es dar ______ que el otro puede examinar.  (sesión 4)</a:t>
             </a:r>
           </a:p>
           <a:p>
@@ -6175,7 +5390,7 @@
                 </a:solidFill>
                 <a:latin typeface="Nunito Sans"/>
               </a:rPr>
-              <a:t>El caso del reloj parado muestra que la definición de saber no es ______.  (sesión 3)</a:t>
+              <a:t>En el cuento, los cortesanos cojeaban para caerle bien al ______.  (sesión 3)</a:t>
             </a:r>
           </a:p>
         </p:txBody>
@@ -6327,7 +5542,7 @@
                 </a:solidFill>
                 <a:latin typeface="Nunito Sans"/>
               </a:rPr>
-              <a:t>Preguntar bien es preguntar para </a:t>
+              <a:t>Emocionar no es manipular: el problema es usar la emoción en </a:t>
             </a:r>
             <a:r>
               <a:rPr sz="2600" b="1">
@@ -6336,7 +5551,7 @@
                 </a:solidFill>
                 <a:latin typeface="Nunito Sans"/>
               </a:rPr>
-              <a:t>entender</a:t>
+              <a:t>lugar</a:t>
             </a:r>
             <a:r>
               <a:rPr sz="2600" b="0">
@@ -6345,7 +5560,7 @@
                 </a:solidFill>
                 <a:latin typeface="Nunito Sans"/>
               </a:rPr>
-              <a:t>, no para pillar al otro.  (sesión 4)</a:t>
+              <a:t> de razones.  (sesión 4)</a:t>
             </a:r>
           </a:p>
           <a:p>
@@ -6370,7 +5585,7 @@
                 </a:solidFill>
                 <a:latin typeface="Nunito Sans"/>
               </a:rPr>
-              <a:t>Antes de contestar, mira qué da por </a:t>
+              <a:t>Convencer es dar </a:t>
             </a:r>
             <a:r>
               <a:rPr sz="2600" b="1">
@@ -6379,7 +5594,7 @@
                 </a:solidFill>
                 <a:latin typeface="Nunito Sans"/>
               </a:rPr>
-              <a:t>hecho</a:t>
+              <a:t>razones</a:t>
             </a:r>
             <a:r>
               <a:rPr sz="2600" b="0">
@@ -6388,7 +5603,7 @@
                 </a:solidFill>
                 <a:latin typeface="Nunito Sans"/>
               </a:rPr>
-              <a:t> la pregunta.  (sesión 4)</a:t>
+              <a:t> que el otro puede examinar.  (sesión 4)</a:t>
             </a:r>
           </a:p>
           <a:p>
@@ -6413,7 +5628,7 @@
                 </a:solidFill>
                 <a:latin typeface="Nunito Sans"/>
               </a:rPr>
-              <a:t>El caso del reloj parado muestra que la definición de saber no es </a:t>
+              <a:t>En el cuento, los cortesanos cojeaban para caerle bien al </a:t>
             </a:r>
             <a:r>
               <a:rPr sz="2600" b="1">
@@ -6422,7 +5637,7 @@
                 </a:solidFill>
                 <a:latin typeface="Nunito Sans"/>
               </a:rPr>
-              <a:t>perfecta</a:t>
+              <a:t>rey</a:t>
             </a:r>
             <a:r>
               <a:rPr sz="2600" b="0">
@@ -6578,7 +5793,7 @@
                 </a:solidFill>
                 <a:latin typeface="Nunito Sans"/>
               </a:rPr>
-              <a:t>Todos en la clase de una chica llevan las mismas zapatillas. Sin darse cuenta, ella empieza a pensar que son las mejores.</a:t>
+              <a:t>En esta unidad has aprendido cuatro herramientas para no creerte cualquier cosa.</a:t>
             </a:r>
           </a:p>
         </p:txBody>
@@ -6617,7 +5832,7 @@
                 </a:solidFill>
                 <a:latin typeface="Nunito Sans"/>
               </a:rPr>
-              <a:t>¿Lo piensa por una razón… o por otra cosa?</a:t>
+              <a:t>¿Cuál de ellas has usado ya fuera de clase?</a:t>
             </a:r>
           </a:p>
         </p:txBody>
@@ -6721,7 +5936,7 @@
                 </a:solidFill>
                 <a:latin typeface="Fredoka"/>
               </a:rPr>
-              <a:t>Cuatro caminos para creer</a:t>
+              <a:t>Repaso de la unidad</a:t>
             </a:r>
           </a:p>
         </p:txBody>
@@ -6786,7 +6001,7 @@
                 </a:solidFill>
                 <a:latin typeface="Nunito Sans"/>
               </a:rPr>
-              <a:t>BLOQUE 1 · CUATRO CAMINOS PARA CREER</a:t>
+              <a:t>BLOQUE 1 · REPASO DE LA UNIDAD</a:t>
             </a:r>
           </a:p>
         </p:txBody>
@@ -6825,14 +6040,57 @@
                 </a:solidFill>
                 <a:latin typeface="Fredoka"/>
               </a:rPr>
-              <a:t>¿De dónde vienen nuestras creencias?</a:t>
-            </a:r>
-          </a:p>
-        </p:txBody>
-      </p:sp>
-      <p:sp>
-        <p:nvSpPr>
-          <p:cNvPr id="4" name="TextBox 3"/>
+              <a:t>Sesión 1 · Pensar críticamente</a:t>
+            </a:r>
+          </a:p>
+        </p:txBody>
+      </p:sp>
+      <p:sp>
+        <p:nvSpPr>
+          <p:cNvPr id="4" name="Rectangle 3"/>
+          <p:cNvSpPr/>
+          <p:nvPr/>
+        </p:nvSpPr>
+        <p:spPr>
+          <a:xfrm>
+            <a:off x="640000" y="1650000"/>
+            <a:ext cx="10912000" cy="1150000"/>
+          </a:xfrm>
+          <a:prstGeom prst="rect">
+            <a:avLst/>
+          </a:prstGeom>
+          <a:solidFill>
+            <a:srgbClr val="EAF0F7"/>
+          </a:solidFill>
+          <a:ln>
+            <a:noFill/>
+          </a:ln>
+        </p:spPr>
+        <p:style>
+          <a:lnRef idx="1">
+            <a:schemeClr val="accent1"/>
+          </a:lnRef>
+          <a:fillRef idx="3">
+            <a:schemeClr val="accent1"/>
+          </a:fillRef>
+          <a:effectRef idx="2">
+            <a:schemeClr val="accent1"/>
+          </a:effectRef>
+          <a:fontRef idx="minor">
+            <a:schemeClr val="lt1"/>
+          </a:fontRef>
+        </p:style>
+        <p:txBody>
+          <a:bodyPr rtlCol="0" anchor="ctr"/>
+          <a:lstStyle/>
+          <a:p>
+            <a:pPr algn="ctr"/>
+          </a:p>
+        </p:txBody>
+      </p:sp>
+      <p:sp>
+        <p:nvSpPr>
+          <p:cNvPr id="5" name="TextBox 4"/>
           <p:cNvSpPr txBox="1"/>
           <p:nvPr/>
         </p:nvSpPr>
@@ -6848,45 +6106,6 @@
         </p:spPr>
         <p:txBody>
           <a:bodyPr wrap="square" anchor="ctr">
-            <a:spAutoFit/>
-          </a:bodyPr>
-          <a:lstStyle/>
-          <a:p>
-            <a:pPr>
-              <a:spcAft>
-                <a:spcPts val="1080"/>
-              </a:spcAft>
-            </a:pPr>
-            <a:r>
-              <a:rPr sz="2400" b="0">
-                <a:solidFill>
-                  <a:srgbClr val="1F2A44"/>
-                </a:solidFill>
-                <a:latin typeface="Nunito Sans"/>
-              </a:rPr>
-              <a:t>Muchas cosas las creemos sin mirar sus razones. Hay cuatro caminos:</a:t>
-            </a:r>
-          </a:p>
-        </p:txBody>
-      </p:sp>
-      <p:sp>
-        <p:nvSpPr>
-          <p:cNvPr id="5" name="TextBox 4"/>
-          <p:cNvSpPr txBox="1"/>
-          <p:nvPr/>
-        </p:nvSpPr>
-        <p:spPr>
-          <a:xfrm>
-            <a:off x="640000" y="3000000"/>
-            <a:ext cx="10912000" cy="3458000"/>
-          </a:xfrm>
-          <a:prstGeom prst="rect">
-            <a:avLst/>
-          </a:prstGeom>
-          <a:noFill/>
-        </p:spPr>
-        <p:txBody>
-          <a:bodyPr wrap="square">
             <a:spAutoFit/>
           </a:bodyPr>
           <a:lstStyle/>
@@ -6899,11 +6118,11 @@
             <a:r>
               <a:rPr sz="2800" b="1">
                 <a:solidFill>
-                  <a:srgbClr val="E8793A"/>
-                </a:solidFill>
-                <a:latin typeface="Nunito Sans"/>
-              </a:rPr>
-              <a:t>• </a:t>
+                  <a:srgbClr val="1F2A44"/>
+                </a:solidFill>
+                <a:latin typeface="Nunito Sans"/>
+              </a:rPr>
+              <a:t>Pensar críticamente es </a:t>
             </a:r>
             <a:r>
               <a:rPr sz="2800" b="1">
@@ -6912,18 +6131,59 @@
                 </a:solidFill>
                 <a:latin typeface="Nunito Sans"/>
               </a:rPr>
-              <a:t>Costumbre:</a:t>
-            </a:r>
-            <a:r>
-              <a:rPr sz="2800" b="0">
+              <a:t>pedir</a:t>
+            </a:r>
+            <a:r>
+              <a:rPr sz="2800" b="1">
                 <a:solidFill>
                   <a:srgbClr val="1F2A44"/>
                 </a:solidFill>
                 <a:latin typeface="Nunito Sans"/>
               </a:rPr>
-              <a:t> «siempre se ha hecho así»</a:t>
-            </a:r>
-          </a:p>
+              <a:t> y </a:t>
+            </a:r>
+            <a:r>
+              <a:rPr sz="2800" b="1">
+                <a:solidFill>
+                  <a:srgbClr val="1F2A44"/>
+                </a:solidFill>
+                <a:latin typeface="Nunito Sans"/>
+              </a:rPr>
+              <a:t>dar</a:t>
+            </a:r>
+            <a:r>
+              <a:rPr sz="2800" b="1">
+                <a:solidFill>
+                  <a:srgbClr val="1F2A44"/>
+                </a:solidFill>
+                <a:latin typeface="Nunito Sans"/>
+              </a:rPr>
+              <a:t> razones antes de aceptar o rechazar una idea.</a:t>
+            </a:r>
+          </a:p>
+        </p:txBody>
+      </p:sp>
+      <p:sp>
+        <p:nvSpPr>
+          <p:cNvPr id="6" name="TextBox 5"/>
+          <p:cNvSpPr txBox="1"/>
+          <p:nvPr/>
+        </p:nvSpPr>
+        <p:spPr>
+          <a:xfrm>
+            <a:off x="640000" y="3000000"/>
+            <a:ext cx="10912000" cy="3458000"/>
+          </a:xfrm>
+          <a:prstGeom prst="rect">
+            <a:avLst/>
+          </a:prstGeom>
+          <a:noFill/>
+        </p:spPr>
+        <p:txBody>
+          <a:bodyPr wrap="square">
+            <a:spAutoFit/>
+          </a:bodyPr>
+          <a:lstStyle/>
           <a:p>
             <a:pPr>
               <a:spcAft>
@@ -6940,22 +6200,13 @@
               <a:t>• </a:t>
             </a:r>
             <a:r>
-              <a:rPr sz="2800" b="1">
+              <a:rPr sz="2800" b="0">
                 <a:solidFill>
                   <a:srgbClr val="1F2A44"/>
                 </a:solidFill>
                 <a:latin typeface="Nunito Sans"/>
               </a:rPr>
-              <a:t>Grupo:</a:t>
-            </a:r>
-            <a:r>
-              <a:rPr sz="2800" b="0">
-                <a:solidFill>
-                  <a:srgbClr val="1F2A44"/>
-                </a:solidFill>
-                <a:latin typeface="Nunito Sans"/>
-              </a:rPr>
-              <a:t> «lo cree toda mi cuadrilla»</a:t>
+              <a:t>No es criticarlo todo ni desconfiar de todo</a:t>
             </a:r>
           </a:p>
           <a:p>
@@ -6974,22 +6225,13 @@
               <a:t>• </a:t>
             </a:r>
             <a:r>
-              <a:rPr sz="2800" b="1">
+              <a:rPr sz="2800" b="0">
                 <a:solidFill>
                   <a:srgbClr val="1F2A44"/>
                 </a:solidFill>
                 <a:latin typeface="Nunito Sans"/>
               </a:rPr>
-              <a:t>Autoridad:</a:t>
-            </a:r>
-            <a:r>
-              <a:rPr sz="2800" b="0">
-                <a:solidFill>
-                  <a:srgbClr val="1F2A44"/>
-                </a:solidFill>
-                <a:latin typeface="Nunito Sans"/>
-              </a:rPr>
-              <a:t> «lo ha dicho alguien importante»</a:t>
+              <a:t>El crédulo se lo cree todo; el desconfiado, nada</a:t>
             </a:r>
           </a:p>
           <a:p>
@@ -7008,22 +6250,13 @@
               <a:t>• </a:t>
             </a:r>
             <a:r>
-              <a:rPr sz="2800" b="1">
+              <a:rPr sz="2800" b="0">
                 <a:solidFill>
                   <a:srgbClr val="1F2A44"/>
                 </a:solidFill>
                 <a:latin typeface="Nunito Sans"/>
               </a:rPr>
-              <a:t>Emoción:</a:t>
-            </a:r>
-            <a:r>
-              <a:rPr sz="2800" b="0">
-                <a:solidFill>
-                  <a:srgbClr val="1F2A44"/>
-                </a:solidFill>
-                <a:latin typeface="Nunito Sans"/>
-              </a:rPr>
-              <a:t> «me gusta creerlo» o «me da miedo»</a:t>
+              <a:t>Pregunta clave: «¿cómo lo sabes?»</a:t>
             </a:r>
           </a:p>
         </p:txBody>
@@ -7088,7 +6321,7 @@
                 </a:solidFill>
                 <a:latin typeface="Nunito Sans"/>
               </a:rPr>
-              <a:t>BLOQUE 1 · CUATRO CAMINOS PARA CREER</a:t>
+              <a:t>BLOQUE 1 · REPASO DE LA UNIDAD</a:t>
             </a:r>
           </a:p>
         </p:txBody>
@@ -7127,7 +6360,7 @@
                 </a:solidFill>
                 <a:latin typeface="Fredoka"/>
               </a:rPr>
-              <a:t>Los cuatro caminos, con ejemplos</a:t>
+              <a:t>Sesión 2 · Hechos, gustos y opiniones</a:t>
             </a:r>
           </a:p>
         </p:txBody>
@@ -7142,7 +6375,7 @@
         </p:nvGraphicFramePr>
         <p:xfrm>
           <a:off x="640000" y="1700000"/>
-          <a:ext cx="10912000" cy="3000000"/>
+          <a:ext cx="10912000" cy="2400000"/>
         </p:xfrm>
         <a:graphic>
           <a:graphicData uri="http://schemas.openxmlformats.org/drawingml/2006/table">
@@ -7168,7 +6401,29 @@
                           </a:solidFill>
                           <a:latin typeface="Fredoka"/>
                         </a:rPr>
-                        <a:t>Camino</a:t>
+                        <a:t>Tipo</a:t>
+                      </a:r>
+                    </a:p>
+                  </a:txBody>
+                  <a:tcPr>
+                    <a:solidFill>
+                      <a:srgbClr val="1F2A44"/>
+                    </a:solidFill>
+                  </a:tcPr>
+                </a:tc>
+                <a:tc>
+                  <a:txBody>
+                    <a:bodyPr/>
+                    <a:lstStyle/>
+                    <a:p>
+                      <a:r>
+                        <a:rPr sz="2000" b="1">
+                          <a:solidFill>
+                            <a:srgbClr val="FBF7EF"/>
+                          </a:solidFill>
+                          <a:latin typeface="Fredoka"/>
+                        </a:rPr>
+                        <a:t>Cómo se reconoce</a:t>
                       </a:r>
                     </a:p>
                   </a:txBody>
@@ -7200,28 +6455,6 @@
                     </a:solidFill>
                   </a:tcPr>
                 </a:tc>
-                <a:tc>
-                  <a:txBody>
-                    <a:bodyPr/>
-                    <a:lstStyle/>
-                    <a:p>
-                      <a:r>
-                        <a:rPr sz="2000" b="1">
-                          <a:solidFill>
-                            <a:srgbClr val="FBF7EF"/>
-                          </a:solidFill>
-                          <a:latin typeface="Fredoka"/>
-                        </a:rPr>
-                        <a:t>Pregunta para revisarla</a:t>
-                      </a:r>
-                    </a:p>
-                  </a:txBody>
-                  <a:tcPr>
-                    <a:solidFill>
-                      <a:srgbClr val="1F2A44"/>
-                    </a:solidFill>
-                  </a:tcPr>
-                </a:tc>
               </a:tr>
               <a:tr h="600000">
                 <a:tc>
@@ -7236,7 +6469,7 @@
                           </a:solidFill>
                           <a:latin typeface="Nunito Sans"/>
                         </a:rPr>
-                        <a:t>Costumbre</a:t>
+                        <a:t>Hecho</a:t>
                       </a:r>
                     </a:p>
                   </a:txBody>
@@ -7258,7 +6491,7 @@
                           </a:solidFill>
                           <a:latin typeface="Nunito Sans"/>
                         </a:rPr>
-                        <a:t>«Se hace así porque siempre se ha hecho así»</a:t>
+                        <a:t>Dice cómo son las cosas: verdadero o falso</a:t>
                       </a:r>
                     </a:p>
                   </a:txBody>
@@ -7280,7 +6513,7 @@
                           </a:solidFill>
                           <a:latin typeface="Nunito Sans"/>
                         </a:rPr>
-                        <a:t>¿Hay alguna razón, o solo es costumbre?</a:t>
+                        <a:t>«San Mamés está en Bilbao»</a:t>
                       </a:r>
                     </a:p>
                   </a:txBody>
@@ -7304,7 +6537,7 @@
                           </a:solidFill>
                           <a:latin typeface="Nunito Sans"/>
                         </a:rPr>
-                        <a:t>Grupo</a:t>
+                        <a:t>Gusto</a:t>
                       </a:r>
                     </a:p>
                   </a:txBody>
@@ -7326,7 +6559,7 @@
                           </a:solidFill>
                           <a:latin typeface="Nunito Sans"/>
                         </a:rPr>
-                        <a:t>«Esa serie es malísima: lo dicen todos mis amigos»</a:t>
+                        <a:t>Habla de lo que me gusta a mí</a:t>
                       </a:r>
                     </a:p>
                   </a:txBody>
@@ -7348,7 +6581,7 @@
                           </a:solidFill>
                           <a:latin typeface="Nunito Sans"/>
                         </a:rPr>
-                        <a:t>¿La he visto yo?</a:t>
+                        <a:t>«Me encanta el recreo»</a:t>
                       </a:r>
                     </a:p>
                   </a:txBody>
@@ -7372,7 +6605,7 @@
                           </a:solidFill>
                           <a:latin typeface="Nunito Sans"/>
                         </a:rPr>
-                        <a:t>Autoridad</a:t>
+                        <a:t>Opinión</a:t>
                       </a:r>
                     </a:p>
                   </a:txBody>
@@ -7394,7 +6627,7 @@
                           </a:solidFill>
                           <a:latin typeface="Nunito Sans"/>
                         </a:rPr>
-                        <a:t>«Lo dice un youtuber con millones de seguidores»</a:t>
+                        <a:t>Qué es bueno o qué deberíamos hacer: con razones</a:t>
                       </a:r>
                     </a:p>
                   </a:txBody>
@@ -7416,81 +6649,13 @@
                           </a:solidFill>
                           <a:latin typeface="Nunito Sans"/>
                         </a:rPr>
-                        <a:t>¿Sabe de ese tema?</a:t>
+                        <a:t>«Habría que alargar el recreo»</a:t>
                       </a:r>
                     </a:p>
                   </a:txBody>
                   <a:tcPr>
                     <a:solidFill>
                       <a:srgbClr val="FFFFFF"/>
-                    </a:solidFill>
-                  </a:tcPr>
-                </a:tc>
-              </a:tr>
-              <a:tr h="600000">
-                <a:tc>
-                  <a:txBody>
-                    <a:bodyPr/>
-                    <a:lstStyle/>
-                    <a:p>
-                      <a:r>
-                        <a:rPr sz="2000" b="1">
-                          <a:solidFill>
-                            <a:srgbClr val="1F2A44"/>
-                          </a:solidFill>
-                          <a:latin typeface="Nunito Sans"/>
-                        </a:rPr>
-                        <a:t>Emoción</a:t>
-                      </a:r>
-                    </a:p>
-                  </a:txBody>
-                  <a:tcPr>
-                    <a:solidFill>
-                      <a:srgbClr val="EAF0F7"/>
-                    </a:solidFill>
-                  </a:tcPr>
-                </a:tc>
-                <a:tc>
-                  <a:txBody>
-                    <a:bodyPr/>
-                    <a:lstStyle/>
-                    <a:p>
-                      <a:r>
-                        <a:rPr sz="2000" b="0">
-                          <a:solidFill>
-                            <a:srgbClr val="1F2A44"/>
-                          </a:solidFill>
-                          <a:latin typeface="Nunito Sans"/>
-                        </a:rPr>
-                        <a:t>«No ha sido falta: es mi equipo»</a:t>
-                      </a:r>
-                    </a:p>
-                  </a:txBody>
-                  <a:tcPr>
-                    <a:solidFill>
-                      <a:srgbClr val="EAF0F7"/>
-                    </a:solidFill>
-                  </a:tcPr>
-                </a:tc>
-                <a:tc>
-                  <a:txBody>
-                    <a:bodyPr/>
-                    <a:lstStyle/>
-                    <a:p>
-                      <a:r>
-                        <a:rPr sz="2000" b="0">
-                          <a:solidFill>
-                            <a:srgbClr val="1F2A44"/>
-                          </a:solidFill>
-                          <a:latin typeface="Nunito Sans"/>
-                        </a:rPr>
-                        <a:t>¿Diría lo mismo si fuera el otro equipo?</a:t>
-                      </a:r>
-                    </a:p>
-                  </a:txBody>
-                  <a:tcPr>
-                    <a:solidFill>
-                      <a:srgbClr val="EAF0F7"/>
                     </a:solidFill>
                   </a:tcPr>
                 </a:tc>
@@ -7559,7 +6724,7 @@
                 </a:solidFill>
                 <a:latin typeface="Nunito Sans"/>
               </a:rPr>
-              <a:t>BLOQUE 1 · CUATRO CAMINOS PARA CREER</a:t>
+              <a:t>BLOQUE 1 · REPASO DE LA UNIDAD</a:t>
             </a:r>
           </a:p>
         </p:txBody>
@@ -7598,7 +6763,334 @@
                 </a:solidFill>
                 <a:latin typeface="Fredoka"/>
               </a:rPr>
-              <a:t>¿Son siempre malos estos caminos?</a:t>
+              <a:t>Sesión 3 · ¿Por qué creemos lo que creemos?</a:t>
+            </a:r>
+          </a:p>
+        </p:txBody>
+      </p:sp>
+      <p:sp>
+        <p:nvSpPr>
+          <p:cNvPr id="4" name="TextBox 3"/>
+          <p:cNvSpPr txBox="1"/>
+          <p:nvPr/>
+        </p:nvSpPr>
+        <p:spPr>
+          <a:xfrm>
+            <a:off x="840000" y="1730000"/>
+            <a:ext cx="10512000" cy="1000000"/>
+          </a:xfrm>
+          <a:prstGeom prst="rect">
+            <a:avLst/>
+          </a:prstGeom>
+          <a:noFill/>
+        </p:spPr>
+        <p:txBody>
+          <a:bodyPr wrap="square" anchor="ctr">
+            <a:spAutoFit/>
+          </a:bodyPr>
+          <a:lstStyle/>
+          <a:p>
+            <a:pPr>
+              <a:spcAft>
+                <a:spcPts val="1080"/>
+              </a:spcAft>
+            </a:pPr>
+            <a:r>
+              <a:rPr sz="2400" b="0">
+                <a:solidFill>
+                  <a:srgbClr val="1F2A44"/>
+                </a:solidFill>
+                <a:latin typeface="Nunito Sans"/>
+              </a:rPr>
+              <a:t>Cuatro caminos que, por sí solos, no son razones:</a:t>
+            </a:r>
+          </a:p>
+        </p:txBody>
+      </p:sp>
+      <p:sp>
+        <p:nvSpPr>
+          <p:cNvPr id="5" name="TextBox 4"/>
+          <p:cNvSpPr txBox="1"/>
+          <p:nvPr/>
+        </p:nvSpPr>
+        <p:spPr>
+          <a:xfrm>
+            <a:off x="640000" y="3000000"/>
+            <a:ext cx="10912000" cy="3458000"/>
+          </a:xfrm>
+          <a:prstGeom prst="rect">
+            <a:avLst/>
+          </a:prstGeom>
+          <a:noFill/>
+        </p:spPr>
+        <p:txBody>
+          <a:bodyPr wrap="square">
+            <a:spAutoFit/>
+          </a:bodyPr>
+          <a:lstStyle/>
+          <a:p>
+            <a:pPr>
+              <a:spcAft>
+                <a:spcPts val="1260"/>
+              </a:spcAft>
+            </a:pPr>
+            <a:r>
+              <a:rPr sz="2800" b="1">
+                <a:solidFill>
+                  <a:srgbClr val="E8793A"/>
+                </a:solidFill>
+                <a:latin typeface="Nunito Sans"/>
+              </a:rPr>
+              <a:t>• </a:t>
+            </a:r>
+            <a:r>
+              <a:rPr sz="2800" b="1">
+                <a:solidFill>
+                  <a:srgbClr val="1F2A44"/>
+                </a:solidFill>
+                <a:latin typeface="Nunito Sans"/>
+              </a:rPr>
+              <a:t>Costumbre:</a:t>
+            </a:r>
+            <a:r>
+              <a:rPr sz="2800" b="0">
+                <a:solidFill>
+                  <a:srgbClr val="1F2A44"/>
+                </a:solidFill>
+                <a:latin typeface="Nunito Sans"/>
+              </a:rPr>
+              <a:t> «siempre se ha hecho así»</a:t>
+            </a:r>
+          </a:p>
+          <a:p>
+            <a:pPr>
+              <a:spcAft>
+                <a:spcPts val="1260"/>
+              </a:spcAft>
+            </a:pPr>
+            <a:r>
+              <a:rPr sz="2800" b="1">
+                <a:solidFill>
+                  <a:srgbClr val="E8793A"/>
+                </a:solidFill>
+                <a:latin typeface="Nunito Sans"/>
+              </a:rPr>
+              <a:t>• </a:t>
+            </a:r>
+            <a:r>
+              <a:rPr sz="2800" b="1">
+                <a:solidFill>
+                  <a:srgbClr val="1F2A44"/>
+                </a:solidFill>
+                <a:latin typeface="Nunito Sans"/>
+              </a:rPr>
+              <a:t>Grupo:</a:t>
+            </a:r>
+            <a:r>
+              <a:rPr sz="2800" b="0">
+                <a:solidFill>
+                  <a:srgbClr val="1F2A44"/>
+                </a:solidFill>
+                <a:latin typeface="Nunito Sans"/>
+              </a:rPr>
+              <a:t> «lo cree toda mi cuadrilla»</a:t>
+            </a:r>
+          </a:p>
+          <a:p>
+            <a:pPr>
+              <a:spcAft>
+                <a:spcPts val="1260"/>
+              </a:spcAft>
+            </a:pPr>
+            <a:r>
+              <a:rPr sz="2800" b="1">
+                <a:solidFill>
+                  <a:srgbClr val="E8793A"/>
+                </a:solidFill>
+                <a:latin typeface="Nunito Sans"/>
+              </a:rPr>
+              <a:t>• </a:t>
+            </a:r>
+            <a:r>
+              <a:rPr sz="2800" b="1">
+                <a:solidFill>
+                  <a:srgbClr val="1F2A44"/>
+                </a:solidFill>
+                <a:latin typeface="Nunito Sans"/>
+              </a:rPr>
+              <a:t>Autoridad:</a:t>
+            </a:r>
+            <a:r>
+              <a:rPr sz="2800" b="0">
+                <a:solidFill>
+                  <a:srgbClr val="1F2A44"/>
+                </a:solidFill>
+                <a:latin typeface="Nunito Sans"/>
+              </a:rPr>
+              <a:t> «lo ha dicho alguien importante»</a:t>
+            </a:r>
+          </a:p>
+          <a:p>
+            <a:pPr>
+              <a:spcAft>
+                <a:spcPts val="1260"/>
+              </a:spcAft>
+            </a:pPr>
+            <a:r>
+              <a:rPr sz="2800" b="1">
+                <a:solidFill>
+                  <a:srgbClr val="E8793A"/>
+                </a:solidFill>
+                <a:latin typeface="Nunito Sans"/>
+              </a:rPr>
+              <a:t>• </a:t>
+            </a:r>
+            <a:r>
+              <a:rPr sz="2800" b="1">
+                <a:solidFill>
+                  <a:srgbClr val="1F2A44"/>
+                </a:solidFill>
+                <a:latin typeface="Nunito Sans"/>
+              </a:rPr>
+              <a:t>Emoción:</a:t>
+            </a:r>
+            <a:r>
+              <a:rPr sz="2800" b="0">
+                <a:solidFill>
+                  <a:srgbClr val="1F2A44"/>
+                </a:solidFill>
+                <a:latin typeface="Nunito Sans"/>
+              </a:rPr>
+              <a:t> «me gusta creerlo» o «me da miedo»</a:t>
+            </a:r>
+          </a:p>
+          <a:p>
+            <a:pPr>
+              <a:spcAft>
+                <a:spcPts val="1260"/>
+              </a:spcAft>
+            </a:pPr>
+            <a:r>
+              <a:rPr sz="2800" b="1">
+                <a:solidFill>
+                  <a:srgbClr val="E8793A"/>
+                </a:solidFill>
+                <a:latin typeface="Nunito Sans"/>
+              </a:rPr>
+              <a:t>• </a:t>
+            </a:r>
+            <a:r>
+              <a:rPr sz="2800" b="0">
+                <a:solidFill>
+                  <a:srgbClr val="1F2A44"/>
+                </a:solidFill>
+                <a:latin typeface="Nunito Sans"/>
+              </a:rPr>
+              <a:t>El rey que cojeaba: todo el palacio cojeaba sin razón</a:t>
+            </a:r>
+          </a:p>
+        </p:txBody>
+      </p:sp>
+    </p:spTree>
+  </p:cSld>
+  <p:clrMapOvr>
+    <a:masterClrMapping/>
+  </p:clrMapOvr>
+</p:sld>
+</file>
+
+<file path=ppt/slides/slide9.xml><?xml version="1.0" encoding="utf-8"?>
+<p:sld xmlns:a="http://schemas.openxmlformats.org/drawingml/2006/main" xmlns:p="http://schemas.openxmlformats.org/presentationml/2006/main" xmlns:r="http://schemas.openxmlformats.org/officeDocument/2006/relationships">
+  <p:cSld>
+    <p:bg>
+      <p:bgPr>
+        <a:solidFill>
+          <a:srgbClr val="FBF7EF"/>
+        </a:solidFill>
+        <a:effectLst/>
+      </p:bgPr>
+    </p:bg>
+    <p:spTree>
+      <p:nvGrpSpPr>
+        <p:cNvPr id="1" name=""/>
+        <p:cNvGrpSpPr/>
+        <p:nvPr/>
+      </p:nvGrpSpPr>
+      <p:grpSpPr/>
+      <p:sp>
+        <p:nvSpPr>
+          <p:cNvPr id="2" name="TextBox 1"/>
+          <p:cNvSpPr txBox="1"/>
+          <p:nvPr/>
+        </p:nvSpPr>
+        <p:spPr>
+          <a:xfrm>
+            <a:off x="640000" y="380000"/>
+            <a:ext cx="10912000" cy="420000"/>
+          </a:xfrm>
+          <a:prstGeom prst="rect">
+            <a:avLst/>
+          </a:prstGeom>
+          <a:noFill/>
+        </p:spPr>
+        <p:txBody>
+          <a:bodyPr wrap="square">
+            <a:spAutoFit/>
+          </a:bodyPr>
+          <a:lstStyle/>
+          <a:p>
+            <a:pPr>
+              <a:spcAft>
+                <a:spcPts val="630"/>
+              </a:spcAft>
+            </a:pPr>
+            <a:r>
+              <a:rPr sz="1400" b="1">
+                <a:solidFill>
+                  <a:srgbClr val="E8793A"/>
+                </a:solidFill>
+                <a:latin typeface="Nunito Sans"/>
+              </a:rPr>
+              <a:t>BLOQUE 1 · REPASO DE LA UNIDAD</a:t>
+            </a:r>
+          </a:p>
+        </p:txBody>
+      </p:sp>
+      <p:sp>
+        <p:nvSpPr>
+          <p:cNvPr id="3" name="TextBox 2"/>
+          <p:cNvSpPr txBox="1"/>
+          <p:nvPr/>
+        </p:nvSpPr>
+        <p:spPr>
+          <a:xfrm>
+            <a:off x="640000" y="760000"/>
+            <a:ext cx="10912000" cy="800000"/>
+          </a:xfrm>
+          <a:prstGeom prst="rect">
+            <a:avLst/>
+          </a:prstGeom>
+          <a:noFill/>
+        </p:spPr>
+        <p:txBody>
+          <a:bodyPr wrap="square">
+            <a:spAutoFit/>
+          </a:bodyPr>
+          <a:lstStyle/>
+          <a:p>
+            <a:pPr>
+              <a:spcAft>
+                <a:spcPts val="1710"/>
+              </a:spcAft>
+            </a:pPr>
+            <a:r>
+              <a:rPr sz="3800" b="1">
+                <a:solidFill>
+                  <a:srgbClr val="1F2A44"/>
+                </a:solidFill>
+                <a:latin typeface="Fredoka"/>
+              </a:rPr>
+              <a:t>Sesión 4 · Convencer y manipular</a:t>
             </a:r>
           </a:p>
         </p:txBody>
@@ -7680,7 +7172,7 @@
                 </a:solidFill>
                 <a:latin typeface="Nunito Sans"/>
               </a:rPr>
-              <a:t>Error</a:t>
+              <a:t>Manipular</a:t>
             </a:r>
           </a:p>
         </p:txBody>
@@ -7722,13 +7214,22 @@
               <a:t>• </a:t>
             </a:r>
             <a:r>
+              <a:rPr sz="2600" b="1">
+                <a:solidFill>
+                  <a:srgbClr val="1F2A44"/>
+                </a:solidFill>
+                <a:latin typeface="Nunito Sans"/>
+              </a:rPr>
+              <a:t>Esquivar</a:t>
+            </a:r>
+            <a:r>
               <a:rPr sz="2600" b="0">
                 <a:solidFill>
                   <a:srgbClr val="1F2A44"/>
                 </a:solidFill>
                 <a:latin typeface="Nunito Sans"/>
               </a:rPr>
-              <a:t>«Si lo cree el grupo, es falso»</a:t>
+              <a:t> tu juicio: prisa, miedo</a:t>
             </a:r>
           </a:p>
           <a:p>
@@ -7753,7 +7254,7 @@
                 </a:solidFill>
                 <a:latin typeface="Nunito Sans"/>
               </a:rPr>
-              <a:t>«Nunca hay que hacer caso a nadie»</a:t>
+              <a:t>Esconder información</a:t>
             </a:r>
           </a:p>
           <a:p>
@@ -7778,7 +7279,7 @@
                 </a:solidFill>
                 <a:latin typeface="Nunito Sans"/>
               </a:rPr>
-              <a:t>«Las emociones no sirven para nada»</a:t>
+              <a:t>La emoción en lugar de las razones</a:t>
             </a:r>
           </a:p>
         </p:txBody>
@@ -7860,7 +7361,7 @@
                 </a:solidFill>
                 <a:latin typeface="Nunito Sans"/>
               </a:rPr>
-              <a:t>Mejor así</a:t>
+              <a:t>Convencer</a:t>
             </a:r>
           </a:p>
         </p:txBody>
@@ -7908,7 +7409,7 @@
                 </a:solidFill>
                 <a:latin typeface="Nunito Sans"/>
               </a:rPr>
-              <a:t>Casi todo lo sabemos porque nos lo cuentan</a:t>
+              <a:t>Dar razones que puedes comprobar</a:t>
             </a:r>
           </a:p>
           <a:p>
@@ -7933,25 +7434,7 @@
                 </a:solidFill>
                 <a:latin typeface="Nunito Sans"/>
               </a:rPr>
-              <a:t>Confiar en quien </a:t>
-            </a:r>
-            <a:r>
-              <a:rPr sz="2600" b="1">
-                <a:solidFill>
-                  <a:srgbClr val="1F2A44"/>
-                </a:solidFill>
-                <a:latin typeface="Nunito Sans"/>
-              </a:rPr>
-              <a:t>sabe del tema</a:t>
-            </a:r>
-            <a:r>
-              <a:rPr sz="2600" b="0">
-                <a:solidFill>
-                  <a:srgbClr val="1F2A44"/>
-                </a:solidFill>
-                <a:latin typeface="Nunito Sans"/>
-              </a:rPr>
-              <a:t> es razonable</a:t>
+              <a:t>Enseñar los datos y dejar tiempo</a:t>
             </a:r>
           </a:p>
           <a:p>
@@ -7976,23 +7459,16 @@
                 </a:solidFill>
                 <a:latin typeface="Nunito Sans"/>
               </a:rPr>
-              <a:t>Las emociones informan: el miedo avisa de peligros</a:t>
-            </a:r>
-          </a:p>
-          <a:p>
-            <a:pPr>
-              <a:spcAft>
-                <a:spcPts val="1170"/>
-              </a:spcAft>
-            </a:pPr>
+              <a:t>Pregunta siempre: ¿qué </a:t>
+            </a:r>
             <a:r>
               <a:rPr sz="2600" b="1">
                 <a:solidFill>
-                  <a:srgbClr val="E8793A"/>
-                </a:solidFill>
-                <a:latin typeface="Nunito Sans"/>
-              </a:rPr>
-              <a:t>• </a:t>
+                  <a:srgbClr val="1F2A44"/>
+                </a:solidFill>
+                <a:latin typeface="Nunito Sans"/>
+              </a:rPr>
+              <a:t>gana</a:t>
             </a:r>
             <a:r>
               <a:rPr sz="2600" b="0">
@@ -8001,111 +7477,7 @@
                 </a:solidFill>
                 <a:latin typeface="Nunito Sans"/>
               </a:rPr>
-              <a:t>El problema es no revisarlas nunca</a:t>
-            </a:r>
-          </a:p>
-        </p:txBody>
-      </p:sp>
-    </p:spTree>
-  </p:cSld>
-  <p:clrMapOvr>
-    <a:masterClrMapping/>
-  </p:clrMapOvr>
-</p:sld>
-</file>
-
-<file path=ppt/slides/slide9.xml><?xml version="1.0" encoding="utf-8"?>
-<p:sld xmlns:a="http://schemas.openxmlformats.org/drawingml/2006/main" xmlns:p="http://schemas.openxmlformats.org/presentationml/2006/main" xmlns:r="http://schemas.openxmlformats.org/officeDocument/2006/relationships">
-  <p:cSld>
-    <p:bg>
-      <p:bgPr>
-        <a:solidFill>
-          <a:srgbClr val="1F2A44"/>
-        </a:solidFill>
-        <a:effectLst/>
-      </p:bgPr>
-    </p:bg>
-    <p:spTree>
-      <p:nvGrpSpPr>
-        <p:cNvPr id="1" name=""/>
-        <p:cNvGrpSpPr/>
-        <p:nvPr/>
-      </p:nvGrpSpPr>
-      <p:grpSpPr/>
-      <p:sp>
-        <p:nvSpPr>
-          <p:cNvPr id="2" name="TextBox 1"/>
-          <p:cNvSpPr txBox="1"/>
-          <p:nvPr/>
-        </p:nvSpPr>
-        <p:spPr>
-          <a:xfrm>
-            <a:off x="640000" y="2300000"/>
-            <a:ext cx="10912000" cy="500000"/>
-          </a:xfrm>
-          <a:prstGeom prst="rect">
-            <a:avLst/>
-          </a:prstGeom>
-          <a:noFill/>
-        </p:spPr>
-        <p:txBody>
-          <a:bodyPr wrap="square">
-            <a:spAutoFit/>
-          </a:bodyPr>
-          <a:lstStyle/>
-          <a:p>
-            <a:pPr>
-              <a:spcAft>
-                <a:spcPts val="810"/>
-              </a:spcAft>
-            </a:pPr>
-            <a:r>
-              <a:rPr sz="1800" b="1">
-                <a:solidFill>
-                  <a:srgbClr val="F4B183"/>
-                </a:solidFill>
-                <a:latin typeface="Nunito Sans"/>
-              </a:rPr>
-              <a:t>BLOQUE 2</a:t>
-            </a:r>
-          </a:p>
-        </p:txBody>
-      </p:sp>
-      <p:sp>
-        <p:nvSpPr>
-          <p:cNvPr id="3" name="TextBox 2"/>
-          <p:cNvSpPr txBox="1"/>
-          <p:nvPr/>
-        </p:nvSpPr>
-        <p:spPr>
-          <a:xfrm>
-            <a:off x="640000" y="2800000"/>
-            <a:ext cx="10912000" cy="800000"/>
-          </a:xfrm>
-          <a:prstGeom prst="rect">
-            <a:avLst/>
-          </a:prstGeom>
-          <a:noFill/>
-        </p:spPr>
-        <p:txBody>
-          <a:bodyPr wrap="square">
-            <a:spAutoFit/>
-          </a:bodyPr>
-          <a:lstStyle/>
-          <a:p>
-            <a:pPr>
-              <a:spcAft>
-                <a:spcPts val="2160"/>
-              </a:spcAft>
-            </a:pPr>
-            <a:r>
-              <a:rPr sz="4800" b="1">
-                <a:solidFill>
-                  <a:srgbClr val="FBF7EF"/>
-                </a:solidFill>
-                <a:latin typeface="Fredoka"/>
-              </a:rPr>
-              <a:t>El rey que cojeaba</a:t>
+              <a:t> quien me lo dice?</a:t>
             </a:r>
           </a:p>
         </p:txBody>
